--- a/examples/thesis-proposal-demo/outputs/tech-route.pptx
+++ b/examples/thesis-proposal-demo/outputs/tech-route.pptx
@@ -87,14 +87,64 @@
       </p:grpSpPr>
       <p:sp>
         <p:nvSpPr>
-          <p:cNvPr id="2" name="Title"/>
-          <p:cNvSpPr/>
-          <p:nvPr/>
-        </p:nvSpPr>
-        <p:spPr>
-          <a:xfrm>
-            <a:off x="4721359" y="290000"/>
-            <a:ext cx="2749280" cy="360000"/>
+          <p:cNvPr id="2" name="Title Band"/>
+          <p:cNvSpPr/>
+          <p:nvPr/>
+        </p:nvSpPr>
+        <p:spPr>
+          <a:xfrm>
+            <a:off x="3912527" y="269999"/>
+            <a:ext cx="4366945" cy="430000"/>
+          </a:xfrm>
+          <a:prstGeom prst="roundRect">
+            <a:avLst/>
+          </a:prstGeom>
+          <a:solidFill>
+            <a:srgbClr val="D9F2F2"/>
+          </a:solidFill>
+          <a:ln w="12700">
+            <a:solidFill>
+              <a:srgbClr val="D9F2F2"/>
+            </a:solidFill>
+          </a:ln>
+        </p:spPr>
+        <p:txBody>
+          <a:bodyPr wrap="square" anchor="ctr"/>
+          <a:lstStyle/>
+          <a:p>
+            <a:pPr algn="ctr"/>
+            <a:r>
+              <a:rPr lang="en-US" sz="2100" b="1">
+                <a:solidFill>
+                  <a:srgbClr val="162033"/>
+                </a:solidFill>
+              </a:rPr>
+              <a:t>Thesis Proposal</a:t>
+            </a:r>
+          </a:p>
+          <a:p>
+            <a:pPr algn="ctr"/>
+            <a:r>
+              <a:rPr lang="en-US" sz="2100" b="1">
+                <a:solidFill>
+                  <a:srgbClr val="162033"/>
+                </a:solidFill>
+              </a:rPr>
+              <a:t>Technical Route</a:t>
+            </a:r>
+          </a:p>
+        </p:txBody>
+      </p:sp>
+      <p:sp>
+        <p:nvSpPr>
+          <p:cNvPr id="3" name="Subtitle"/>
+          <p:cNvSpPr/>
+          <p:nvPr/>
+        </p:nvSpPr>
+        <p:spPr>
+          <a:xfrm>
+            <a:off x="4742527" y="714999"/>
+            <a:ext cx="2706945" cy="190000"/>
           </a:xfrm>
           <a:prstGeom prst="rect">
             <a:avLst/>
@@ -114,48 +164,60 @@
           <a:p>
             <a:pPr algn="ctr"/>
             <a:r>
-              <a:rPr lang="en-US" sz="2100" b="1">
-                <a:solidFill>
-                  <a:srgbClr val="1F2937"/>
-                </a:solidFill>
-              </a:rPr>
-              <a:t>Thesis Proposal</a:t>
-            </a:r>
-          </a:p>
-          <a:p>
-            <a:pPr algn="ctr"/>
-            <a:r>
-              <a:rPr lang="en-US" sz="2100" b="1">
-                <a:solidFill>
-                  <a:srgbClr val="1F2937"/>
-                </a:solidFill>
-              </a:rPr>
-              <a:t>Technical Route</a:t>
-            </a:r>
-          </a:p>
-        </p:txBody>
-      </p:sp>
-      <p:sp>
-        <p:nvSpPr>
-          <p:cNvPr id="3" name="Stage Research Question"/>
-          <p:cNvSpPr/>
-          <p:nvPr/>
-        </p:nvSpPr>
-        <p:spPr>
-          <a:xfrm>
-            <a:off x="5557009" y="862612"/>
-            <a:ext cx="1077981" cy="652722"/>
-          </a:xfrm>
-          <a:prstGeom prst="roundRect">
-            <a:avLst/>
-          </a:prstGeom>
-          <a:solidFill>
-            <a:srgbClr val="EFF6FF"/>
-          </a:solidFill>
-          <a:ln w="12700">
-            <a:solidFill>
-              <a:srgbClr val="93C5FD"/>
-            </a:solidFill>
+              <a:rPr lang="en-US" sz="850">
+                <a:solidFill>
+                  <a:srgbClr val="5B6472"/>
+                </a:solidFill>
+              </a:rPr>
+              <a:t>Data-driven PV</a:t>
+            </a:r>
+          </a:p>
+          <a:p>
+            <a:pPr algn="ctr"/>
+            <a:r>
+              <a:rPr lang="en-US" sz="850">
+                <a:solidFill>
+                  <a:srgbClr val="5B6472"/>
+                </a:solidFill>
+              </a:rPr>
+              <a:t>module degradation</a:t>
+            </a:r>
+          </a:p>
+          <a:p>
+            <a:pPr algn="ctr"/>
+            <a:r>
+              <a:rPr lang="en-US" sz="850">
+                <a:solidFill>
+                  <a:srgbClr val="5B6472"/>
+                </a:solidFill>
+              </a:rPr>
+              <a:t>assessment demo</a:t>
+            </a:r>
+          </a:p>
+        </p:txBody>
+      </p:sp>
+      <p:sp>
+        <p:nvSpPr>
+          <p:cNvPr id="4" name="Stage Research Question"/>
+          <p:cNvSpPr/>
+          <p:nvPr/>
+        </p:nvSpPr>
+        <p:spPr>
+          <a:xfrm>
+            <a:off x="4303779" y="890855"/>
+            <a:ext cx="4215221" cy="730905"/>
+          </a:xfrm>
+          <a:prstGeom prst="roundRect">
+            <a:avLst/>
+          </a:prstGeom>
+          <a:solidFill>
+            <a:srgbClr val="D9F2F2"/>
+          </a:solidFill>
+          <a:ln w="12700">
+            <a:solidFill>
+              <a:srgbClr val="6FAEC3"/>
+            </a:solidFill>
+            <a:prstDash val="dash"/>
           </a:ln>
         </p:spPr>
         <p:txBody>
@@ -166,7 +228,7 @@
             <a:r>
               <a:rPr lang="en-US" sz="1000">
                 <a:solidFill>
-                  <a:srgbClr val="1F2937"/>
+                  <a:srgbClr val="162033"/>
                 </a:solidFill>
               </a:rPr>
               <a:t/>
@@ -176,24 +238,24 @@
       </p:sp>
       <p:sp>
         <p:nvSpPr>
-          <p:cNvPr id="4" name="Header Research Question"/>
-          <p:cNvSpPr/>
-          <p:nvPr/>
-        </p:nvSpPr>
-        <p:spPr>
-          <a:xfrm>
-            <a:off x="5557009" y="862612"/>
-            <a:ext cx="1077981" cy="260000"/>
-          </a:xfrm>
-          <a:prstGeom prst="roundRect">
-            <a:avLst/>
-          </a:prstGeom>
-          <a:solidFill>
-            <a:srgbClr val="1D4ED8"/>
-          </a:solidFill>
-          <a:ln w="12700">
-            <a:solidFill>
-              <a:srgbClr val="1D4ED8"/>
+          <p:cNvPr id="5" name="Header Research Question"/>
+          <p:cNvSpPr/>
+          <p:nvPr/>
+        </p:nvSpPr>
+        <p:spPr>
+          <a:xfrm>
+            <a:off x="4303779" y="890855"/>
+            <a:ext cx="4215221" cy="260000"/>
+          </a:xfrm>
+          <a:prstGeom prst="roundRect">
+            <a:avLst/>
+          </a:prstGeom>
+          <a:solidFill>
+            <a:srgbClr val="7BCFD0"/>
+          </a:solidFill>
+          <a:ln w="12700">
+            <a:solidFill>
+              <a:srgbClr val="7BCFD0"/>
             </a:solidFill>
           </a:ln>
         </p:spPr>
@@ -205,7 +267,7 @@
             <a:r>
               <a:rPr lang="en-US" sz="1100" b="1">
                 <a:solidFill>
-                  <a:srgbClr val="FFFFFF"/>
+                  <a:srgbClr val="122033"/>
                 </a:solidFill>
               </a:rPr>
               <a:t>Research Question</a:t>
@@ -215,25 +277,26 @@
       </p:sp>
       <p:sp>
         <p:nvSpPr>
-          <p:cNvPr id="5" name="Stage Source Evidence"/>
-          <p:cNvSpPr/>
-          <p:nvPr/>
-        </p:nvSpPr>
-        <p:spPr>
-          <a:xfrm>
-            <a:off x="5077356" y="1782358"/>
-            <a:ext cx="2037286" cy="652722"/>
-          </a:xfrm>
-          <a:prstGeom prst="roundRect">
-            <a:avLst/>
-          </a:prstGeom>
-          <a:solidFill>
-            <a:srgbClr val="EFF6FF"/>
-          </a:solidFill>
-          <a:ln w="12700">
-            <a:solidFill>
-              <a:srgbClr val="93C5FD"/>
-            </a:solidFill>
+          <p:cNvPr id="6" name="Stage Source Evidence"/>
+          <p:cNvSpPr/>
+          <p:nvPr/>
+        </p:nvSpPr>
+        <p:spPr>
+          <a:xfrm>
+            <a:off x="4303779" y="1811996"/>
+            <a:ext cx="4215221" cy="730905"/>
+          </a:xfrm>
+          <a:prstGeom prst="roundRect">
+            <a:avLst/>
+          </a:prstGeom>
+          <a:solidFill>
+            <a:srgbClr val="F7E0E8"/>
+          </a:solidFill>
+          <a:ln w="12700">
+            <a:solidFill>
+              <a:srgbClr val="6FAEC3"/>
+            </a:solidFill>
+            <a:prstDash val="dash"/>
           </a:ln>
         </p:spPr>
         <p:txBody>
@@ -244,7 +307,7 @@
             <a:r>
               <a:rPr lang="en-US" sz="1000">
                 <a:solidFill>
-                  <a:srgbClr val="1F2937"/>
+                  <a:srgbClr val="162033"/>
                 </a:solidFill>
               </a:rPr>
               <a:t/>
@@ -254,24 +317,24 @@
       </p:sp>
       <p:sp>
         <p:nvSpPr>
-          <p:cNvPr id="6" name="Header Source Evidence"/>
-          <p:cNvSpPr/>
-          <p:nvPr/>
-        </p:nvSpPr>
-        <p:spPr>
-          <a:xfrm>
-            <a:off x="5077356" y="1782358"/>
-            <a:ext cx="2037286" cy="260000"/>
-          </a:xfrm>
-          <a:prstGeom prst="roundRect">
-            <a:avLst/>
-          </a:prstGeom>
-          <a:solidFill>
-            <a:srgbClr val="1D4ED8"/>
-          </a:solidFill>
-          <a:ln w="12700">
-            <a:solidFill>
-              <a:srgbClr val="1D4ED8"/>
+          <p:cNvPr id="7" name="Header Source Evidence"/>
+          <p:cNvSpPr/>
+          <p:nvPr/>
+        </p:nvSpPr>
+        <p:spPr>
+          <a:xfrm>
+            <a:off x="4303779" y="1811996"/>
+            <a:ext cx="4215221" cy="260000"/>
+          </a:xfrm>
+          <a:prstGeom prst="roundRect">
+            <a:avLst/>
+          </a:prstGeom>
+          <a:solidFill>
+            <a:srgbClr val="7BCFD0"/>
+          </a:solidFill>
+          <a:ln w="12700">
+            <a:solidFill>
+              <a:srgbClr val="7BCFD0"/>
             </a:solidFill>
           </a:ln>
         </p:spPr>
@@ -283,7 +346,7 @@
             <a:r>
               <a:rPr lang="en-US" sz="1100" b="1">
                 <a:solidFill>
-                  <a:srgbClr val="FFFFFF"/>
+                  <a:srgbClr val="122033"/>
                 </a:solidFill>
               </a:rPr>
               <a:t>Source Evidence</a:t>
@@ -293,25 +356,26 @@
       </p:sp>
       <p:sp>
         <p:nvSpPr>
-          <p:cNvPr id="7" name="Stage Feature Route"/>
-          <p:cNvSpPr/>
-          <p:nvPr/>
-        </p:nvSpPr>
-        <p:spPr>
-          <a:xfrm>
-            <a:off x="5077356" y="2702104"/>
-            <a:ext cx="2037286" cy="652722"/>
-          </a:xfrm>
-          <a:prstGeom prst="roundRect">
-            <a:avLst/>
-          </a:prstGeom>
-          <a:solidFill>
-            <a:srgbClr val="EFF6FF"/>
-          </a:solidFill>
-          <a:ln w="12700">
-            <a:solidFill>
-              <a:srgbClr val="93C5FD"/>
-            </a:solidFill>
+          <p:cNvPr id="8" name="Stage Feature Route"/>
+          <p:cNvSpPr/>
+          <p:nvPr/>
+        </p:nvSpPr>
+        <p:spPr>
+          <a:xfrm>
+            <a:off x="4303779" y="2733137"/>
+            <a:ext cx="4215221" cy="730905"/>
+          </a:xfrm>
+          <a:prstGeom prst="roundRect">
+            <a:avLst/>
+          </a:prstGeom>
+          <a:solidFill>
+            <a:srgbClr val="FFF1C7"/>
+          </a:solidFill>
+          <a:ln w="12700">
+            <a:solidFill>
+              <a:srgbClr val="6FAEC3"/>
+            </a:solidFill>
+            <a:prstDash val="dash"/>
           </a:ln>
         </p:spPr>
         <p:txBody>
@@ -322,7 +386,7 @@
             <a:r>
               <a:rPr lang="en-US" sz="1000">
                 <a:solidFill>
-                  <a:srgbClr val="1F2937"/>
+                  <a:srgbClr val="162033"/>
                 </a:solidFill>
               </a:rPr>
               <a:t/>
@@ -332,24 +396,24 @@
       </p:sp>
       <p:sp>
         <p:nvSpPr>
-          <p:cNvPr id="8" name="Header Feature Route"/>
-          <p:cNvSpPr/>
-          <p:nvPr/>
-        </p:nvSpPr>
-        <p:spPr>
-          <a:xfrm>
-            <a:off x="5077356" y="2702104"/>
-            <a:ext cx="2037286" cy="260000"/>
-          </a:xfrm>
-          <a:prstGeom prst="roundRect">
-            <a:avLst/>
-          </a:prstGeom>
-          <a:solidFill>
-            <a:srgbClr val="1D4ED8"/>
-          </a:solidFill>
-          <a:ln w="12700">
-            <a:solidFill>
-              <a:srgbClr val="1D4ED8"/>
+          <p:cNvPr id="9" name="Header Feature Route"/>
+          <p:cNvSpPr/>
+          <p:nvPr/>
+        </p:nvSpPr>
+        <p:spPr>
+          <a:xfrm>
+            <a:off x="4303779" y="2733137"/>
+            <a:ext cx="4215221" cy="260000"/>
+          </a:xfrm>
+          <a:prstGeom prst="roundRect">
+            <a:avLst/>
+          </a:prstGeom>
+          <a:solidFill>
+            <a:srgbClr val="7BCFD0"/>
+          </a:solidFill>
+          <a:ln w="12700">
+            <a:solidFill>
+              <a:srgbClr val="7BCFD0"/>
             </a:solidFill>
           </a:ln>
         </p:spPr>
@@ -361,7 +425,7 @@
             <a:r>
               <a:rPr lang="en-US" sz="1100" b="1">
                 <a:solidFill>
-                  <a:srgbClr val="FFFFFF"/>
+                  <a:srgbClr val="122033"/>
                 </a:solidFill>
               </a:rPr>
               <a:t>Feature Route</a:t>
@@ -371,25 +435,26 @@
       </p:sp>
       <p:sp>
         <p:nvSpPr>
-          <p:cNvPr id="9" name="Stage Modeling"/>
-          <p:cNvSpPr/>
-          <p:nvPr/>
-        </p:nvSpPr>
-        <p:spPr>
-          <a:xfrm>
-            <a:off x="5077356" y="3621849"/>
-            <a:ext cx="2037286" cy="652722"/>
-          </a:xfrm>
-          <a:prstGeom prst="roundRect">
-            <a:avLst/>
-          </a:prstGeom>
-          <a:solidFill>
-            <a:srgbClr val="EFF6FF"/>
-          </a:solidFill>
-          <a:ln w="12700">
-            <a:solidFill>
-              <a:srgbClr val="93C5FD"/>
-            </a:solidFill>
+          <p:cNvPr id="10" name="Stage Modeling"/>
+          <p:cNvSpPr/>
+          <p:nvPr/>
+        </p:nvSpPr>
+        <p:spPr>
+          <a:xfrm>
+            <a:off x="4303779" y="3654279"/>
+            <a:ext cx="4215221" cy="730905"/>
+          </a:xfrm>
+          <a:prstGeom prst="roundRect">
+            <a:avLst/>
+          </a:prstGeom>
+          <a:solidFill>
+            <a:srgbClr val="DDECF9"/>
+          </a:solidFill>
+          <a:ln w="12700">
+            <a:solidFill>
+              <a:srgbClr val="6FAEC3"/>
+            </a:solidFill>
+            <a:prstDash val="dash"/>
           </a:ln>
         </p:spPr>
         <p:txBody>
@@ -400,7 +465,7 @@
             <a:r>
               <a:rPr lang="en-US" sz="1000">
                 <a:solidFill>
-                  <a:srgbClr val="1F2937"/>
+                  <a:srgbClr val="162033"/>
                 </a:solidFill>
               </a:rPr>
               <a:t/>
@@ -410,24 +475,24 @@
       </p:sp>
       <p:sp>
         <p:nvSpPr>
-          <p:cNvPr id="10" name="Header Modeling"/>
-          <p:cNvSpPr/>
-          <p:nvPr/>
-        </p:nvSpPr>
-        <p:spPr>
-          <a:xfrm>
-            <a:off x="5077356" y="3621849"/>
-            <a:ext cx="2037286" cy="260000"/>
-          </a:xfrm>
-          <a:prstGeom prst="roundRect">
-            <a:avLst/>
-          </a:prstGeom>
-          <a:solidFill>
-            <a:srgbClr val="1D4ED8"/>
-          </a:solidFill>
-          <a:ln w="12700">
-            <a:solidFill>
-              <a:srgbClr val="1D4ED8"/>
+          <p:cNvPr id="11" name="Header Modeling"/>
+          <p:cNvSpPr/>
+          <p:nvPr/>
+        </p:nvSpPr>
+        <p:spPr>
+          <a:xfrm>
+            <a:off x="4303779" y="3654279"/>
+            <a:ext cx="4215221" cy="260000"/>
+          </a:xfrm>
+          <a:prstGeom prst="roundRect">
+            <a:avLst/>
+          </a:prstGeom>
+          <a:solidFill>
+            <a:srgbClr val="7BCFD0"/>
+          </a:solidFill>
+          <a:ln w="12700">
+            <a:solidFill>
+              <a:srgbClr val="7BCFD0"/>
             </a:solidFill>
           </a:ln>
         </p:spPr>
@@ -439,7 +504,7 @@
             <a:r>
               <a:rPr lang="en-US" sz="1100" b="1">
                 <a:solidFill>
-                  <a:srgbClr val="FFFFFF"/>
+                  <a:srgbClr val="122033"/>
                 </a:solidFill>
               </a:rPr>
               <a:t>Modeling</a:t>
@@ -449,25 +514,26 @@
       </p:sp>
       <p:sp>
         <p:nvSpPr>
-          <p:cNvPr id="11" name="Stage Validation"/>
-          <p:cNvSpPr/>
-          <p:nvPr/>
-        </p:nvSpPr>
-        <p:spPr>
-          <a:xfrm>
-            <a:off x="5077356" y="4541595"/>
-            <a:ext cx="2037286" cy="652722"/>
-          </a:xfrm>
-          <a:prstGeom prst="roundRect">
-            <a:avLst/>
-          </a:prstGeom>
-          <a:solidFill>
-            <a:srgbClr val="EFF6FF"/>
-          </a:solidFill>
-          <a:ln w="12700">
-            <a:solidFill>
-              <a:srgbClr val="93C5FD"/>
-            </a:solidFill>
+          <p:cNvPr id="12" name="Stage Validation"/>
+          <p:cNvSpPr/>
+          <p:nvPr/>
+        </p:nvSpPr>
+        <p:spPr>
+          <a:xfrm>
+            <a:off x="4303779" y="4575420"/>
+            <a:ext cx="4215221" cy="730905"/>
+          </a:xfrm>
+          <a:prstGeom prst="roundRect">
+            <a:avLst/>
+          </a:prstGeom>
+          <a:solidFill>
+            <a:srgbClr val="E6F4D7"/>
+          </a:solidFill>
+          <a:ln w="12700">
+            <a:solidFill>
+              <a:srgbClr val="6FAEC3"/>
+            </a:solidFill>
+            <a:prstDash val="dash"/>
           </a:ln>
         </p:spPr>
         <p:txBody>
@@ -478,7 +544,7 @@
             <a:r>
               <a:rPr lang="en-US" sz="1000">
                 <a:solidFill>
-                  <a:srgbClr val="1F2937"/>
+                  <a:srgbClr val="162033"/>
                 </a:solidFill>
               </a:rPr>
               <a:t/>
@@ -488,24 +554,24 @@
       </p:sp>
       <p:sp>
         <p:nvSpPr>
-          <p:cNvPr id="12" name="Header Validation"/>
-          <p:cNvSpPr/>
-          <p:nvPr/>
-        </p:nvSpPr>
-        <p:spPr>
-          <a:xfrm>
-            <a:off x="5077356" y="4541595"/>
-            <a:ext cx="2037286" cy="260000"/>
-          </a:xfrm>
-          <a:prstGeom prst="roundRect">
-            <a:avLst/>
-          </a:prstGeom>
-          <a:solidFill>
-            <a:srgbClr val="1D4ED8"/>
-          </a:solidFill>
-          <a:ln w="12700">
-            <a:solidFill>
-              <a:srgbClr val="1D4ED8"/>
+          <p:cNvPr id="13" name="Header Validation"/>
+          <p:cNvSpPr/>
+          <p:nvPr/>
+        </p:nvSpPr>
+        <p:spPr>
+          <a:xfrm>
+            <a:off x="4303779" y="4575420"/>
+            <a:ext cx="4215221" cy="260000"/>
+          </a:xfrm>
+          <a:prstGeom prst="roundRect">
+            <a:avLst/>
+          </a:prstGeom>
+          <a:solidFill>
+            <a:srgbClr val="7BCFD0"/>
+          </a:solidFill>
+          <a:ln w="12700">
+            <a:solidFill>
+              <a:srgbClr val="7BCFD0"/>
             </a:solidFill>
           </a:ln>
         </p:spPr>
@@ -517,7 +583,7 @@
             <a:r>
               <a:rPr lang="en-US" sz="1100" b="1">
                 <a:solidFill>
-                  <a:srgbClr val="FFFFFF"/>
+                  <a:srgbClr val="122033"/>
                 </a:solidFill>
               </a:rPr>
               <a:t>Validation</a:t>
@@ -527,25 +593,26 @@
       </p:sp>
       <p:sp>
         <p:nvSpPr>
-          <p:cNvPr id="13" name="Stage Thesis Output"/>
-          <p:cNvSpPr/>
-          <p:nvPr/>
-        </p:nvSpPr>
-        <p:spPr>
-          <a:xfrm>
-            <a:off x="5557009" y="5461341"/>
-            <a:ext cx="1077981" cy="652722"/>
-          </a:xfrm>
-          <a:prstGeom prst="roundRect">
-            <a:avLst/>
-          </a:prstGeom>
-          <a:solidFill>
-            <a:srgbClr val="EFF6FF"/>
-          </a:solidFill>
-          <a:ln w="12700">
-            <a:solidFill>
-              <a:srgbClr val="93C5FD"/>
-            </a:solidFill>
+          <p:cNvPr id="14" name="Stage Thesis Output"/>
+          <p:cNvSpPr/>
+          <p:nvPr/>
+        </p:nvSpPr>
+        <p:spPr>
+          <a:xfrm>
+            <a:off x="4303779" y="5496561"/>
+            <a:ext cx="4215221" cy="730905"/>
+          </a:xfrm>
+          <a:prstGeom prst="roundRect">
+            <a:avLst/>
+          </a:prstGeom>
+          <a:solidFill>
+            <a:srgbClr val="F6E7D7"/>
+          </a:solidFill>
+          <a:ln w="12700">
+            <a:solidFill>
+              <a:srgbClr val="6FAEC3"/>
+            </a:solidFill>
+            <a:prstDash val="dash"/>
           </a:ln>
         </p:spPr>
         <p:txBody>
@@ -556,7 +623,7 @@
             <a:r>
               <a:rPr lang="en-US" sz="1000">
                 <a:solidFill>
-                  <a:srgbClr val="1F2937"/>
+                  <a:srgbClr val="162033"/>
                 </a:solidFill>
               </a:rPr>
               <a:t/>
@@ -566,24 +633,24 @@
       </p:sp>
       <p:sp>
         <p:nvSpPr>
-          <p:cNvPr id="14" name="Header Thesis Output"/>
-          <p:cNvSpPr/>
-          <p:nvPr/>
-        </p:nvSpPr>
-        <p:spPr>
-          <a:xfrm>
-            <a:off x="5557009" y="5461341"/>
-            <a:ext cx="1077981" cy="260000"/>
-          </a:xfrm>
-          <a:prstGeom prst="roundRect">
-            <a:avLst/>
-          </a:prstGeom>
-          <a:solidFill>
-            <a:srgbClr val="1D4ED8"/>
-          </a:solidFill>
-          <a:ln w="12700">
-            <a:solidFill>
-              <a:srgbClr val="1D4ED8"/>
+          <p:cNvPr id="15" name="Header Thesis Output"/>
+          <p:cNvSpPr/>
+          <p:nvPr/>
+        </p:nvSpPr>
+        <p:spPr>
+          <a:xfrm>
+            <a:off x="4303779" y="5496561"/>
+            <a:ext cx="4215221" cy="260000"/>
+          </a:xfrm>
+          <a:prstGeom prst="roundRect">
+            <a:avLst/>
+          </a:prstGeom>
+          <a:solidFill>
+            <a:srgbClr val="7BCFD0"/>
+          </a:solidFill>
+          <a:ln w="12700">
+            <a:solidFill>
+              <a:srgbClr val="7BCFD0"/>
             </a:solidFill>
           </a:ln>
         </p:spPr>
@@ -595,7 +662,7 @@
             <a:r>
               <a:rPr lang="en-US" sz="1100" b="1">
                 <a:solidFill>
-                  <a:srgbClr val="FFFFFF"/>
+                  <a:srgbClr val="122033"/>
                 </a:solidFill>
               </a:rPr>
               <a:t>Thesis Output</a:t>
@@ -603,28 +670,6 @@
           </a:p>
         </p:txBody>
       </p:sp>
-      <p:cxnSp>
-        <p:nvCxnSpPr>
-          <p:cNvPr id="15" name="Connector 15"/>
-          <p:cNvCxnSpPr/>
-          <p:nvPr/>
-        </p:nvCxnSpPr>
-        <p:spPr>
-          <a:xfrm flipH="1">
-            <a:off x="5616347" y="1282926"/>
-            <a:ext cx="479652" cy="919745"/>
-          </a:xfrm>
-          <a:prstGeom prst="line">
-            <a:avLst/>
-          </a:prstGeom>
-          <a:ln w="19050">
-            <a:solidFill>
-              <a:srgbClr val="2563EB"/>
-            </a:solidFill>
-            <a:headEnd type="triangle"/>
-          </a:ln>
-        </p:spPr>
-      </p:cxnSp>
       <p:cxnSp>
         <p:nvCxnSpPr>
           <p:cNvPr id="16" name="Connector 16"/>
@@ -632,16 +677,16 @@
           <p:nvPr/>
         </p:nvCxnSpPr>
         <p:spPr>
-          <a:xfrm>
-            <a:off x="5616347" y="2202672"/>
-            <a:ext cx="959304" cy="1"/>
+          <a:xfrm flipH="1">
+            <a:off x="5425168" y="1346420"/>
+            <a:ext cx="986221" cy="921141"/>
           </a:xfrm>
           <a:prstGeom prst="line">
             <a:avLst/>
           </a:prstGeom>
           <a:ln w="19050">
             <a:solidFill>
-              <a:srgbClr val="2563EB"/>
+              <a:srgbClr val="2C6A93"/>
             </a:solidFill>
             <a:headEnd type="triangle"/>
           </a:ln>
@@ -654,16 +699,16 @@
           <p:nvPr/>
         </p:nvCxnSpPr>
         <p:spPr>
-          <a:xfrm flipH="1">
-            <a:off x="5616347" y="2202672"/>
-            <a:ext cx="959304" cy="919745"/>
+          <a:xfrm>
+            <a:off x="5425168" y="2267561"/>
+            <a:ext cx="1972443" cy="1"/>
           </a:xfrm>
           <a:prstGeom prst="line">
             <a:avLst/>
           </a:prstGeom>
           <a:ln w="19050">
             <a:solidFill>
-              <a:srgbClr val="2563EB"/>
+              <a:srgbClr val="2C6A93"/>
             </a:solidFill>
             <a:headEnd type="triangle"/>
           </a:ln>
@@ -676,16 +721,16 @@
           <p:nvPr/>
         </p:nvCxnSpPr>
         <p:spPr>
-          <a:xfrm>
-            <a:off x="5616347" y="3122418"/>
-            <a:ext cx="959304" cy="1"/>
+          <a:xfrm flipH="1">
+            <a:off x="5425168" y="2267561"/>
+            <a:ext cx="1972443" cy="921141"/>
           </a:xfrm>
           <a:prstGeom prst="line">
             <a:avLst/>
           </a:prstGeom>
           <a:ln w="19050">
             <a:solidFill>
-              <a:srgbClr val="2563EB"/>
+              <a:srgbClr val="2C6A93"/>
             </a:solidFill>
             <a:headEnd type="triangle"/>
           </a:ln>
@@ -698,16 +743,16 @@
           <p:nvPr/>
         </p:nvCxnSpPr>
         <p:spPr>
-          <a:xfrm flipH="1">
-            <a:off x="5616347" y="3122418"/>
-            <a:ext cx="959304" cy="919745"/>
+          <a:xfrm>
+            <a:off x="5425168" y="3188702"/>
+            <a:ext cx="1972443" cy="1"/>
           </a:xfrm>
           <a:prstGeom prst="line">
             <a:avLst/>
           </a:prstGeom>
           <a:ln w="19050">
             <a:solidFill>
-              <a:srgbClr val="2563EB"/>
+              <a:srgbClr val="2C6A93"/>
             </a:solidFill>
             <a:headEnd type="triangle"/>
           </a:ln>
@@ -720,16 +765,16 @@
           <p:nvPr/>
         </p:nvCxnSpPr>
         <p:spPr>
-          <a:xfrm>
-            <a:off x="5616347" y="4042163"/>
-            <a:ext cx="959304" cy="1"/>
+          <a:xfrm flipH="1">
+            <a:off x="5425168" y="3188702"/>
+            <a:ext cx="1972443" cy="921141"/>
           </a:xfrm>
           <a:prstGeom prst="line">
             <a:avLst/>
           </a:prstGeom>
           <a:ln w="19050">
             <a:solidFill>
-              <a:srgbClr val="2563EB"/>
+              <a:srgbClr val="2C6A93"/>
             </a:solidFill>
             <a:headEnd type="triangle"/>
           </a:ln>
@@ -742,16 +787,16 @@
           <p:nvPr/>
         </p:nvCxnSpPr>
         <p:spPr>
-          <a:xfrm flipH="1">
-            <a:off x="5616347" y="4042163"/>
-            <a:ext cx="959304" cy="919745"/>
+          <a:xfrm>
+            <a:off x="5425168" y="4109843"/>
+            <a:ext cx="1972443" cy="1"/>
           </a:xfrm>
           <a:prstGeom prst="line">
             <a:avLst/>
           </a:prstGeom>
           <a:ln w="19050">
             <a:solidFill>
-              <a:srgbClr val="2563EB"/>
+              <a:srgbClr val="2C6A93"/>
             </a:solidFill>
             <a:headEnd type="triangle"/>
           </a:ln>
@@ -764,16 +809,16 @@
           <p:nvPr/>
         </p:nvCxnSpPr>
         <p:spPr>
-          <a:xfrm>
-            <a:off x="5616347" y="4961909"/>
-            <a:ext cx="959304" cy="1"/>
+          <a:xfrm flipH="1">
+            <a:off x="5425168" y="4109843"/>
+            <a:ext cx="1972443" cy="921141"/>
           </a:xfrm>
           <a:prstGeom prst="line">
             <a:avLst/>
           </a:prstGeom>
           <a:ln w="19050">
             <a:solidFill>
-              <a:srgbClr val="2563EB"/>
+              <a:srgbClr val="2C6A93"/>
             </a:solidFill>
             <a:headEnd type="triangle"/>
           </a:ln>
@@ -786,16 +831,38 @@
           <p:nvPr/>
         </p:nvCxnSpPr>
         <p:spPr>
+          <a:xfrm>
+            <a:off x="5425168" y="5030984"/>
+            <a:ext cx="1972443" cy="1"/>
+          </a:xfrm>
+          <a:prstGeom prst="line">
+            <a:avLst/>
+          </a:prstGeom>
+          <a:ln w="19050">
+            <a:solidFill>
+              <a:srgbClr val="2C6A93"/>
+            </a:solidFill>
+            <a:headEnd type="triangle"/>
+          </a:ln>
+        </p:spPr>
+      </p:cxnSp>
+      <p:cxnSp>
+        <p:nvCxnSpPr>
+          <p:cNvPr id="24" name="Connector 24"/>
+          <p:cNvCxnSpPr/>
+          <p:nvPr/>
+        </p:nvCxnSpPr>
+        <p:spPr>
           <a:xfrm flipH="1">
-            <a:off x="6096000" y="4961909"/>
-            <a:ext cx="479652" cy="919745"/>
+            <a:off x="6411390" y="5030984"/>
+            <a:ext cx="986221" cy="921141"/>
           </a:xfrm>
           <a:prstGeom prst="line">
             <a:avLst/>
           </a:prstGeom>
           <a:ln w="19050">
             <a:solidFill>
-              <a:srgbClr val="2563EB"/>
+              <a:srgbClr val="2C6A93"/>
             </a:solidFill>
             <a:headEnd type="triangle"/>
           </a:ln>
@@ -803,14 +870,14 @@
       </p:cxnSp>
       <p:sp>
         <p:nvSpPr>
-          <p:cNvPr id="24" name="Node question_define"/>
-          <p:cNvSpPr/>
-          <p:nvPr/>
-        </p:nvSpPr>
-        <p:spPr>
-          <a:xfrm>
-            <a:off x="5655906" y="1139525"/>
-            <a:ext cx="880186" cy="286802"/>
+          <p:cNvPr id="25" name="Node question_define"/>
+          <p:cNvSpPr/>
+          <p:nvPr/>
+        </p:nvSpPr>
+        <p:spPr>
+          <a:xfrm>
+            <a:off x="4478996" y="1191227"/>
+            <a:ext cx="3864787" cy="310384"/>
           </a:xfrm>
           <a:prstGeom prst="roundRect">
             <a:avLst/>
@@ -820,19 +887,19 @@
           </a:solidFill>
           <a:ln w="12700">
             <a:solidFill>
-              <a:srgbClr val="60A5FA"/>
-            </a:solidFill>
-          </a:ln>
-        </p:spPr>
-        <p:txBody>
-          <a:bodyPr wrap="square" anchor="ctr"/>
-          <a:lstStyle/>
-          <a:p>
-            <a:pPr algn="ctr"/>
-            <a:r>
-              <a:rPr lang="en-US" sz="1050">
-                <a:solidFill>
-                  <a:srgbClr val="1F2937"/>
+              <a:srgbClr val="9FB6C4"/>
+            </a:solidFill>
+          </a:ln>
+        </p:spPr>
+        <p:txBody>
+          <a:bodyPr wrap="square" anchor="ctr"/>
+          <a:lstStyle/>
+          <a:p>
+            <a:pPr algn="ctr"/>
+            <a:r>
+              <a:rPr lang="en-US" sz="1050">
+                <a:solidFill>
+                  <a:srgbClr val="162033"/>
                 </a:solidFill>
               </a:rPr>
               <a:t>Define degradation</a:t>
@@ -843,7 +910,7 @@
             <a:r>
               <a:rPr lang="en-US" sz="1050">
                 <a:solidFill>
-                  <a:srgbClr val="1F2937"/>
+                  <a:srgbClr val="162033"/>
                 </a:solidFill>
               </a:rPr>
               <a:t>risk</a:t>
@@ -853,14 +920,14 @@
       </p:sp>
       <p:sp>
         <p:nvSpPr>
-          <p:cNvPr id="25" name="Node evidence_collect"/>
-          <p:cNvSpPr/>
-          <p:nvPr/>
-        </p:nvSpPr>
-        <p:spPr>
-          <a:xfrm>
-            <a:off x="5176254" y="2059271"/>
-            <a:ext cx="880186" cy="286802"/>
+          <p:cNvPr id="26" name="Node evidence_collect"/>
+          <p:cNvSpPr/>
+          <p:nvPr/>
+        </p:nvSpPr>
+        <p:spPr>
+          <a:xfrm>
+            <a:off x="4478996" y="2112368"/>
+            <a:ext cx="1892344" cy="310384"/>
           </a:xfrm>
           <a:prstGeom prst="roundRect">
             <a:avLst/>
@@ -870,19 +937,19 @@
           </a:solidFill>
           <a:ln w="12700">
             <a:solidFill>
-              <a:srgbClr val="60A5FA"/>
-            </a:solidFill>
-          </a:ln>
-        </p:spPr>
-        <p:txBody>
-          <a:bodyPr wrap="square" anchor="ctr"/>
-          <a:lstStyle/>
-          <a:p>
-            <a:pPr algn="ctr"/>
-            <a:r>
-              <a:rPr lang="en-US" sz="1050">
-                <a:solidFill>
-                  <a:srgbClr val="1F2937"/>
+              <a:srgbClr val="9FB6C4"/>
+            </a:solidFill>
+          </a:ln>
+        </p:spPr>
+        <p:txBody>
+          <a:bodyPr wrap="square" anchor="ctr"/>
+          <a:lstStyle/>
+          <a:p>
+            <a:pPr algn="ctr"/>
+            <a:r>
+              <a:rPr lang="en-US" sz="1050">
+                <a:solidFill>
+                  <a:srgbClr val="162033"/>
                 </a:solidFill>
               </a:rPr>
               <a:t>Collect field</a:t>
@@ -893,7 +960,7 @@
             <a:r>
               <a:rPr lang="en-US" sz="1050">
                 <a:solidFill>
-                  <a:srgbClr val="1F2937"/>
+                  <a:srgbClr val="162033"/>
                 </a:solidFill>
               </a:rPr>
               <a:t>evidence</a:t>
@@ -903,14 +970,14 @@
       </p:sp>
       <p:sp>
         <p:nvSpPr>
-          <p:cNvPr id="26" name="Node evidence_align"/>
-          <p:cNvSpPr/>
-          <p:nvPr/>
-        </p:nvSpPr>
-        <p:spPr>
-          <a:xfrm>
-            <a:off x="6135558" y="2059271"/>
-            <a:ext cx="880186" cy="286802"/>
+          <p:cNvPr id="27" name="Node evidence_align"/>
+          <p:cNvSpPr/>
+          <p:nvPr/>
+        </p:nvSpPr>
+        <p:spPr>
+          <a:xfrm>
+            <a:off x="6451440" y="2112368"/>
+            <a:ext cx="1892344" cy="310384"/>
           </a:xfrm>
           <a:prstGeom prst="roundRect">
             <a:avLst/>
@@ -920,19 +987,19 @@
           </a:solidFill>
           <a:ln w="12700">
             <a:solidFill>
-              <a:srgbClr val="60A5FA"/>
-            </a:solidFill>
-          </a:ln>
-        </p:spPr>
-        <p:txBody>
-          <a:bodyPr wrap="square" anchor="ctr"/>
-          <a:lstStyle/>
-          <a:p>
-            <a:pPr algn="ctr"/>
-            <a:r>
-              <a:rPr lang="en-US" sz="1050">
-                <a:solidFill>
-                  <a:srgbClr val="1F2937"/>
+              <a:srgbClr val="9FB6C4"/>
+            </a:solidFill>
+          </a:ln>
+        </p:spPr>
+        <p:txBody>
+          <a:bodyPr wrap="square" anchor="ctr"/>
+          <a:lstStyle/>
+          <a:p>
+            <a:pPr algn="ctr"/>
+            <a:r>
+              <a:rPr lang="en-US" sz="1050">
+                <a:solidFill>
+                  <a:srgbClr val="162033"/>
                 </a:solidFill>
               </a:rPr>
               <a:t>Clean and align</a:t>
@@ -943,7 +1010,7 @@
             <a:r>
               <a:rPr lang="en-US" sz="1050">
                 <a:solidFill>
-                  <a:srgbClr val="1F2937"/>
+                  <a:srgbClr val="162033"/>
                 </a:solidFill>
               </a:rPr>
               <a:t>data</a:t>
@@ -953,14 +1020,14 @@
       </p:sp>
       <p:sp>
         <p:nvSpPr>
-          <p:cNvPr id="27" name="Node features_construct"/>
-          <p:cNvSpPr/>
-          <p:nvPr/>
-        </p:nvSpPr>
-        <p:spPr>
-          <a:xfrm>
-            <a:off x="5176254" y="2979016"/>
-            <a:ext cx="880186" cy="286802"/>
+          <p:cNvPr id="28" name="Node features_construct"/>
+          <p:cNvSpPr/>
+          <p:nvPr/>
+        </p:nvSpPr>
+        <p:spPr>
+          <a:xfrm>
+            <a:off x="4478996" y="3033510"/>
+            <a:ext cx="1892344" cy="310384"/>
           </a:xfrm>
           <a:prstGeom prst="roundRect">
             <a:avLst/>
@@ -970,19 +1037,19 @@
           </a:solidFill>
           <a:ln w="12700">
             <a:solidFill>
-              <a:srgbClr val="60A5FA"/>
-            </a:solidFill>
-          </a:ln>
-        </p:spPr>
-        <p:txBody>
-          <a:bodyPr wrap="square" anchor="ctr"/>
-          <a:lstStyle/>
-          <a:p>
-            <a:pPr algn="ctr"/>
-            <a:r>
-              <a:rPr lang="en-US" sz="1050">
-                <a:solidFill>
-                  <a:srgbClr val="1F2937"/>
+              <a:srgbClr val="9FB6C4"/>
+            </a:solidFill>
+          </a:ln>
+        </p:spPr>
+        <p:txBody>
+          <a:bodyPr wrap="square" anchor="ctr"/>
+          <a:lstStyle/>
+          <a:p>
+            <a:pPr algn="ctr"/>
+            <a:r>
+              <a:rPr lang="en-US" sz="1050">
+                <a:solidFill>
+                  <a:srgbClr val="162033"/>
                 </a:solidFill>
               </a:rPr>
               <a:t>Construct</a:t>
@@ -993,7 +1060,7 @@
             <a:r>
               <a:rPr lang="en-US" sz="1050">
                 <a:solidFill>
-                  <a:srgbClr val="1F2937"/>
+                  <a:srgbClr val="162033"/>
                 </a:solidFill>
               </a:rPr>
               <a:t>indicators</a:t>
@@ -1003,14 +1070,14 @@
       </p:sp>
       <p:sp>
         <p:nvSpPr>
-          <p:cNvPr id="28" name="Node features_select"/>
-          <p:cNvSpPr/>
-          <p:nvPr/>
-        </p:nvSpPr>
-        <p:spPr>
-          <a:xfrm>
-            <a:off x="6135558" y="2979016"/>
-            <a:ext cx="880186" cy="286802"/>
+          <p:cNvPr id="29" name="Node features_select"/>
+          <p:cNvSpPr/>
+          <p:nvPr/>
+        </p:nvSpPr>
+        <p:spPr>
+          <a:xfrm>
+            <a:off x="6451440" y="3033510"/>
+            <a:ext cx="1892344" cy="310384"/>
           </a:xfrm>
           <a:prstGeom prst="roundRect">
             <a:avLst/>
@@ -1020,19 +1087,19 @@
           </a:solidFill>
           <a:ln w="12700">
             <a:solidFill>
-              <a:srgbClr val="60A5FA"/>
-            </a:solidFill>
-          </a:ln>
-        </p:spPr>
-        <p:txBody>
-          <a:bodyPr wrap="square" anchor="ctr"/>
-          <a:lstStyle/>
-          <a:p>
-            <a:pPr algn="ctr"/>
-            <a:r>
-              <a:rPr lang="en-US" sz="1050">
-                <a:solidFill>
-                  <a:srgbClr val="1F2937"/>
+              <a:srgbClr val="9FB6C4"/>
+            </a:solidFill>
+          </a:ln>
+        </p:spPr>
+        <p:txBody>
+          <a:bodyPr wrap="square" anchor="ctr"/>
+          <a:lstStyle/>
+          <a:p>
+            <a:pPr algn="ctr"/>
+            <a:r>
+              <a:rPr lang="en-US" sz="1050">
+                <a:solidFill>
+                  <a:srgbClr val="162033"/>
                 </a:solidFill>
               </a:rPr>
               <a:t>Select feature</a:t>
@@ -1043,7 +1110,7 @@
             <a:r>
               <a:rPr lang="en-US" sz="1050">
                 <a:solidFill>
-                  <a:srgbClr val="1F2937"/>
+                  <a:srgbClr val="162033"/>
                 </a:solidFill>
               </a:rPr>
               <a:t>groups</a:t>
@@ -1053,14 +1120,14 @@
       </p:sp>
       <p:sp>
         <p:nvSpPr>
-          <p:cNvPr id="29" name="Node model_fit"/>
-          <p:cNvSpPr/>
-          <p:nvPr/>
-        </p:nvSpPr>
-        <p:spPr>
-          <a:xfrm>
-            <a:off x="5176254" y="3898762"/>
-            <a:ext cx="880186" cy="286802"/>
+          <p:cNvPr id="30" name="Node model_fit"/>
+          <p:cNvSpPr/>
+          <p:nvPr/>
+        </p:nvSpPr>
+        <p:spPr>
+          <a:xfrm>
+            <a:off x="4478996" y="3954651"/>
+            <a:ext cx="1892344" cy="310384"/>
           </a:xfrm>
           <a:prstGeom prst="roundRect">
             <a:avLst/>
@@ -1070,19 +1137,19 @@
           </a:solidFill>
           <a:ln w="12700">
             <a:solidFill>
-              <a:srgbClr val="60A5FA"/>
-            </a:solidFill>
-          </a:ln>
-        </p:spPr>
-        <p:txBody>
-          <a:bodyPr wrap="square" anchor="ctr"/>
-          <a:lstStyle/>
-          <a:p>
-            <a:pPr algn="ctr"/>
-            <a:r>
-              <a:rPr lang="en-US" sz="1050">
-                <a:solidFill>
-                  <a:srgbClr val="1F2937"/>
+              <a:srgbClr val="9FB6C4"/>
+            </a:solidFill>
+          </a:ln>
+        </p:spPr>
+        <p:txBody>
+          <a:bodyPr wrap="square" anchor="ctr"/>
+          <a:lstStyle/>
+          <a:p>
+            <a:pPr algn="ctr"/>
+            <a:r>
+              <a:rPr lang="en-US" sz="1050">
+                <a:solidFill>
+                  <a:srgbClr val="162033"/>
                 </a:solidFill>
               </a:rPr>
               <a:t>Fit interpretable</a:t>
@@ -1093,7 +1160,7 @@
             <a:r>
               <a:rPr lang="en-US" sz="1050">
                 <a:solidFill>
-                  <a:srgbClr val="1F2937"/>
+                  <a:srgbClr val="162033"/>
                 </a:solidFill>
               </a:rPr>
               <a:t>model</a:t>
@@ -1103,14 +1170,14 @@
       </p:sp>
       <p:sp>
         <p:nvSpPr>
-          <p:cNvPr id="30" name="Node model_uncertainty"/>
-          <p:cNvSpPr/>
-          <p:nvPr/>
-        </p:nvSpPr>
-        <p:spPr>
-          <a:xfrm>
-            <a:off x="6135558" y="3898762"/>
-            <a:ext cx="880186" cy="286802"/>
+          <p:cNvPr id="31" name="Node model_uncertainty"/>
+          <p:cNvSpPr/>
+          <p:nvPr/>
+        </p:nvSpPr>
+        <p:spPr>
+          <a:xfrm>
+            <a:off x="6451440" y="3954651"/>
+            <a:ext cx="1892344" cy="310384"/>
           </a:xfrm>
           <a:prstGeom prst="roundRect">
             <a:avLst/>
@@ -1120,19 +1187,19 @@
           </a:solidFill>
           <a:ln w="12700">
             <a:solidFill>
-              <a:srgbClr val="60A5FA"/>
-            </a:solidFill>
-          </a:ln>
-        </p:spPr>
-        <p:txBody>
-          <a:bodyPr wrap="square" anchor="ctr"/>
-          <a:lstStyle/>
-          <a:p>
-            <a:pPr algn="ctr"/>
-            <a:r>
-              <a:rPr lang="en-US" sz="1050">
-                <a:solidFill>
-                  <a:srgbClr val="1F2937"/>
+              <a:srgbClr val="9FB6C4"/>
+            </a:solidFill>
+          </a:ln>
+        </p:spPr>
+        <p:txBody>
+          <a:bodyPr wrap="square" anchor="ctr"/>
+          <a:lstStyle/>
+          <a:p>
+            <a:pPr algn="ctr"/>
+            <a:r>
+              <a:rPr lang="en-US" sz="1050">
+                <a:solidFill>
+                  <a:srgbClr val="162033"/>
                 </a:solidFill>
               </a:rPr>
               <a:t>Label uncertainty</a:t>
@@ -1142,14 +1209,14 @@
       </p:sp>
       <p:sp>
         <p:nvSpPr>
-          <p:cNvPr id="31" name="Node validation_cases"/>
-          <p:cNvSpPr/>
-          <p:nvPr/>
-        </p:nvSpPr>
-        <p:spPr>
-          <a:xfrm>
-            <a:off x="5176254" y="4818508"/>
-            <a:ext cx="880186" cy="286802"/>
+          <p:cNvPr id="32" name="Node validation_cases"/>
+          <p:cNvSpPr/>
+          <p:nvPr/>
+        </p:nvSpPr>
+        <p:spPr>
+          <a:xfrm>
+            <a:off x="4478996" y="4875792"/>
+            <a:ext cx="1892344" cy="310384"/>
           </a:xfrm>
           <a:prstGeom prst="roundRect">
             <a:avLst/>
@@ -1159,19 +1226,19 @@
           </a:solidFill>
           <a:ln w="12700">
             <a:solidFill>
-              <a:srgbClr val="60A5FA"/>
-            </a:solidFill>
-          </a:ln>
-        </p:spPr>
-        <p:txBody>
-          <a:bodyPr wrap="square" anchor="ctr"/>
-          <a:lstStyle/>
-          <a:p>
-            <a:pPr algn="ctr"/>
-            <a:r>
-              <a:rPr lang="en-US" sz="1050">
-                <a:solidFill>
-                  <a:srgbClr val="1F2937"/>
+              <a:srgbClr val="9FB6C4"/>
+            </a:solidFill>
+          </a:ln>
+        </p:spPr>
+        <p:txBody>
+          <a:bodyPr wrap="square" anchor="ctr"/>
+          <a:lstStyle/>
+          <a:p>
+            <a:pPr algn="ctr"/>
+            <a:r>
+              <a:rPr lang="en-US" sz="1050">
+                <a:solidFill>
+                  <a:srgbClr val="162033"/>
                 </a:solidFill>
               </a:rPr>
               <a:t>Validate on fault</a:t>
@@ -1182,7 +1249,7 @@
             <a:r>
               <a:rPr lang="en-US" sz="1050">
                 <a:solidFill>
-                  <a:srgbClr val="1F2937"/>
+                  <a:srgbClr val="162033"/>
                 </a:solidFill>
               </a:rPr>
               <a:t>cases</a:t>
@@ -1192,14 +1259,14 @@
       </p:sp>
       <p:sp>
         <p:nvSpPr>
-          <p:cNvPr id="32" name="Node validation_review"/>
-          <p:cNvSpPr/>
-          <p:nvPr/>
-        </p:nvSpPr>
-        <p:spPr>
-          <a:xfrm>
-            <a:off x="6135558" y="4818508"/>
-            <a:ext cx="880186" cy="286802"/>
+          <p:cNvPr id="33" name="Node validation_review"/>
+          <p:cNvSpPr/>
+          <p:nvPr/>
+        </p:nvSpPr>
+        <p:spPr>
+          <a:xfrm>
+            <a:off x="6451440" y="4875792"/>
+            <a:ext cx="1892344" cy="310384"/>
           </a:xfrm>
           <a:prstGeom prst="roundRect">
             <a:avLst/>
@@ -1209,19 +1276,19 @@
           </a:solidFill>
           <a:ln w="12700">
             <a:solidFill>
-              <a:srgbClr val="60A5FA"/>
-            </a:solidFill>
-          </a:ln>
-        </p:spPr>
-        <p:txBody>
-          <a:bodyPr wrap="square" anchor="ctr"/>
-          <a:lstStyle/>
-          <a:p>
-            <a:pPr algn="ctr"/>
-            <a:r>
-              <a:rPr lang="en-US" sz="1050">
-                <a:solidFill>
-                  <a:srgbClr val="1F2937"/>
+              <a:srgbClr val="9FB6C4"/>
+            </a:solidFill>
+          </a:ln>
+        </p:spPr>
+        <p:txBody>
+          <a:bodyPr wrap="square" anchor="ctr"/>
+          <a:lstStyle/>
+          <a:p>
+            <a:pPr algn="ctr"/>
+            <a:r>
+              <a:rPr lang="en-US" sz="1050">
+                <a:solidFill>
+                  <a:srgbClr val="162033"/>
                 </a:solidFill>
               </a:rPr>
               <a:t>Review feature</a:t>
@@ -1232,7 +1299,7 @@
             <a:r>
               <a:rPr lang="en-US" sz="1050">
                 <a:solidFill>
-                  <a:srgbClr val="1F2937"/>
+                  <a:srgbClr val="162033"/>
                 </a:solidFill>
               </a:rPr>
               <a:t>ablation</a:t>
@@ -1242,14 +1309,14 @@
       </p:sp>
       <p:sp>
         <p:nvSpPr>
-          <p:cNvPr id="33" name="Node output_priority"/>
-          <p:cNvSpPr/>
-          <p:nvPr/>
-        </p:nvSpPr>
-        <p:spPr>
-          <a:xfrm>
-            <a:off x="5655906" y="5738254"/>
-            <a:ext cx="880186" cy="286802"/>
+          <p:cNvPr id="34" name="Node output_priority"/>
+          <p:cNvSpPr/>
+          <p:nvPr/>
+        </p:nvSpPr>
+        <p:spPr>
+          <a:xfrm>
+            <a:off x="4478996" y="5796933"/>
+            <a:ext cx="3864787" cy="310384"/>
           </a:xfrm>
           <a:prstGeom prst="roundRect">
             <a:avLst/>
@@ -1259,19 +1326,19 @@
           </a:solidFill>
           <a:ln w="12700">
             <a:solidFill>
-              <a:srgbClr val="60A5FA"/>
-            </a:solidFill>
-          </a:ln>
-        </p:spPr>
-        <p:txBody>
-          <a:bodyPr wrap="square" anchor="ctr"/>
-          <a:lstStyle/>
-          <a:p>
-            <a:pPr algn="ctr"/>
-            <a:r>
-              <a:rPr lang="en-US" sz="1050">
-                <a:solidFill>
-                  <a:srgbClr val="1F2937"/>
+              <a:srgbClr val="9FB6C4"/>
+            </a:solidFill>
+          </a:ln>
+        </p:spPr>
+        <p:txBody>
+          <a:bodyPr wrap="square" anchor="ctr"/>
+          <a:lstStyle/>
+          <a:p>
+            <a:pPr algn="ctr"/>
+            <a:r>
+              <a:rPr lang="en-US" sz="1050">
+                <a:solidFill>
+                  <a:srgbClr val="162033"/>
                 </a:solidFill>
               </a:rPr>
               <a:t>Output inspection</a:t>
@@ -1282,7 +1349,7 @@
             <a:r>
               <a:rPr lang="en-US" sz="1050">
                 <a:solidFill>
-                  <a:srgbClr val="1F2937"/>
+                  <a:srgbClr val="162033"/>
                 </a:solidFill>
               </a:rPr>
               <a:t>priority</a:t>

--- a/examples/thesis-proposal-demo/outputs/tech-route.pptx
+++ b/examples/thesis-proposal-demo/outputs/tech-route.pptx
@@ -93,8 +93,8 @@
         </p:nvSpPr>
         <p:spPr>
           <a:xfrm>
-            <a:off x="3912527" y="269999"/>
-            <a:ext cx="4366945" cy="430000"/>
+            <a:off x="2300273" y="270000"/>
+            <a:ext cx="7591452" cy="430000"/>
           </a:xfrm>
           <a:prstGeom prst="roundRect">
             <a:avLst/>
@@ -119,7 +119,7 @@
                   <a:srgbClr val="162033"/>
                 </a:solidFill>
               </a:rPr>
-              <a:t>Thesis Proposal</a:t>
+              <a:t>PV Module</a:t>
             </a:r>
           </a:p>
           <a:p>
@@ -130,6 +130,28 @@
                   <a:srgbClr val="162033"/>
                 </a:solidFill>
               </a:rPr>
+              <a:t>Degradation</a:t>
+            </a:r>
+          </a:p>
+          <a:p>
+            <a:pPr algn="ctr"/>
+            <a:r>
+              <a:rPr lang="en-US" sz="2100" b="1">
+                <a:solidFill>
+                  <a:srgbClr val="162033"/>
+                </a:solidFill>
+              </a:rPr>
+              <a:t>Assessment</a:t>
+            </a:r>
+          </a:p>
+          <a:p>
+            <a:pPr algn="ctr"/>
+            <a:r>
+              <a:rPr lang="en-US" sz="2100" b="1">
+                <a:solidFill>
+                  <a:srgbClr val="162033"/>
+                </a:solidFill>
+              </a:rPr>
               <a:t>Technical Route</a:t>
             </a:r>
           </a:p>
@@ -143,8 +165,8 @@
         </p:nvSpPr>
         <p:spPr>
           <a:xfrm>
-            <a:off x="4742527" y="714999"/>
-            <a:ext cx="2706945" cy="190000"/>
+            <a:off x="3130273" y="715000"/>
+            <a:ext cx="5931452" cy="190000"/>
           </a:xfrm>
           <a:prstGeom prst="rect">
             <a:avLst/>
@@ -169,7 +191,7 @@
                   <a:srgbClr val="5B6472"/>
                 </a:solidFill>
               </a:rPr>
-              <a:t>Data-driven PV</a:t>
+              <a:t>Thesis proposal</a:t>
             </a:r>
           </a:p>
           <a:p>
@@ -180,7 +202,7 @@
                   <a:srgbClr val="5B6472"/>
                 </a:solidFill>
               </a:rPr>
-              <a:t>module degradation</a:t>
+              <a:t>route generated by</a:t>
             </a:r>
           </a:p>
           <a:p>
@@ -191,21 +213,21 @@
                   <a:srgbClr val="5B6472"/>
                 </a:solidFill>
               </a:rPr>
-              <a:t>assessment demo</a:t>
-            </a:r>
-          </a:p>
-        </p:txBody>
-      </p:sp>
-      <p:sp>
-        <p:nvSpPr>
-          <p:cNvPr id="4" name="Stage Research Question"/>
-          <p:cNvSpPr/>
-          <p:nvPr/>
-        </p:nvSpPr>
-        <p:spPr>
-          <a:xfrm>
-            <a:off x="4303779" y="890855"/>
-            <a:ext cx="4215221" cy="730905"/>
+              <a:t>tech-route-maker</a:t>
+            </a:r>
+          </a:p>
+        </p:txBody>
+      </p:sp>
+      <p:sp>
+        <p:nvSpPr>
+          <p:cNvPr id="4" name="Stage Research Objective"/>
+          <p:cNvSpPr/>
+          <p:nvPr/>
+        </p:nvSpPr>
+        <p:spPr>
+          <a:xfrm>
+            <a:off x="3253376" y="1207337"/>
+            <a:ext cx="6761581" cy="869346"/>
           </a:xfrm>
           <a:prstGeom prst="roundRect">
             <a:avLst/>
@@ -238,14 +260,14 @@
       </p:sp>
       <p:sp>
         <p:nvSpPr>
-          <p:cNvPr id="5" name="Header Research Question"/>
-          <p:cNvSpPr/>
-          <p:nvPr/>
-        </p:nvSpPr>
-        <p:spPr>
-          <a:xfrm>
-            <a:off x="4303779" y="890855"/>
-            <a:ext cx="4215221" cy="260000"/>
+          <p:cNvPr id="5" name="Label Research Objective"/>
+          <p:cNvSpPr/>
+          <p:nvPr/>
+        </p:nvSpPr>
+        <p:spPr>
+          <a:xfrm>
+            <a:off x="2108047" y="1448822"/>
+            <a:ext cx="883145" cy="386376"/>
           </a:xfrm>
           <a:prstGeom prst="roundRect">
             <a:avLst/>
@@ -265,26 +287,26 @@
           <a:p>
             <a:pPr algn="ctr"/>
             <a:r>
-              <a:rPr lang="en-US" sz="1100" b="1">
+              <a:rPr lang="en-US" sz="1050" b="1">
                 <a:solidFill>
                   <a:srgbClr val="122033"/>
                 </a:solidFill>
               </a:rPr>
-              <a:t>Research Question</a:t>
-            </a:r>
-          </a:p>
-        </p:txBody>
-      </p:sp>
-      <p:sp>
-        <p:nvSpPr>
-          <p:cNvPr id="6" name="Stage Source Evidence"/>
-          <p:cNvSpPr/>
-          <p:nvPr/>
-        </p:nvSpPr>
-        <p:spPr>
-          <a:xfrm>
-            <a:off x="4303779" y="1811996"/>
-            <a:ext cx="4215221" cy="730905"/>
+              <a:t>Research Objective</a:t>
+            </a:r>
+          </a:p>
+        </p:txBody>
+      </p:sp>
+      <p:sp>
+        <p:nvSpPr>
+          <p:cNvPr id="6" name="Stage Research Content"/>
+          <p:cNvSpPr/>
+          <p:nvPr/>
+        </p:nvSpPr>
+        <p:spPr>
+          <a:xfrm>
+            <a:off x="3253376" y="2242273"/>
+            <a:ext cx="6761581" cy="869346"/>
           </a:xfrm>
           <a:prstGeom prst="roundRect">
             <a:avLst/>
@@ -317,14 +339,14 @@
       </p:sp>
       <p:sp>
         <p:nvSpPr>
-          <p:cNvPr id="7" name="Header Source Evidence"/>
-          <p:cNvSpPr/>
-          <p:nvPr/>
-        </p:nvSpPr>
-        <p:spPr>
-          <a:xfrm>
-            <a:off x="4303779" y="1811996"/>
-            <a:ext cx="4215221" cy="260000"/>
+          <p:cNvPr id="7" name="Label Research Content"/>
+          <p:cNvSpPr/>
+          <p:nvPr/>
+        </p:nvSpPr>
+        <p:spPr>
+          <a:xfrm>
+            <a:off x="2108047" y="2483758"/>
+            <a:ext cx="883145" cy="386376"/>
           </a:xfrm>
           <a:prstGeom prst="roundRect">
             <a:avLst/>
@@ -344,26 +366,26 @@
           <a:p>
             <a:pPr algn="ctr"/>
             <a:r>
-              <a:rPr lang="en-US" sz="1100" b="1">
+              <a:rPr lang="en-US" sz="1050" b="1">
                 <a:solidFill>
                   <a:srgbClr val="122033"/>
                 </a:solidFill>
               </a:rPr>
-              <a:t>Source Evidence</a:t>
-            </a:r>
-          </a:p>
-        </p:txBody>
-      </p:sp>
-      <p:sp>
-        <p:nvSpPr>
-          <p:cNvPr id="8" name="Stage Feature Route"/>
-          <p:cNvSpPr/>
-          <p:nvPr/>
-        </p:nvSpPr>
-        <p:spPr>
-          <a:xfrm>
-            <a:off x="4303779" y="2733137"/>
-            <a:ext cx="4215221" cy="730905"/>
+              <a:t>Research Content</a:t>
+            </a:r>
+          </a:p>
+        </p:txBody>
+      </p:sp>
+      <p:sp>
+        <p:nvSpPr>
+          <p:cNvPr id="8" name="Stage Key Technologies"/>
+          <p:cNvSpPr/>
+          <p:nvPr/>
+        </p:nvSpPr>
+        <p:spPr>
+          <a:xfrm>
+            <a:off x="3253376" y="3277209"/>
+            <a:ext cx="6761581" cy="869346"/>
           </a:xfrm>
           <a:prstGeom prst="roundRect">
             <a:avLst/>
@@ -396,14 +418,14 @@
       </p:sp>
       <p:sp>
         <p:nvSpPr>
-          <p:cNvPr id="9" name="Header Feature Route"/>
-          <p:cNvSpPr/>
-          <p:nvPr/>
-        </p:nvSpPr>
-        <p:spPr>
-          <a:xfrm>
-            <a:off x="4303779" y="2733137"/>
-            <a:ext cx="4215221" cy="260000"/>
+          <p:cNvPr id="9" name="Label Key Technologies"/>
+          <p:cNvSpPr/>
+          <p:nvPr/>
+        </p:nvSpPr>
+        <p:spPr>
+          <a:xfrm>
+            <a:off x="2108047" y="3518694"/>
+            <a:ext cx="883145" cy="386376"/>
           </a:xfrm>
           <a:prstGeom prst="roundRect">
             <a:avLst/>
@@ -423,26 +445,26 @@
           <a:p>
             <a:pPr algn="ctr"/>
             <a:r>
-              <a:rPr lang="en-US" sz="1100" b="1">
+              <a:rPr lang="en-US" sz="1050" b="1">
                 <a:solidFill>
                   <a:srgbClr val="122033"/>
                 </a:solidFill>
               </a:rPr>
-              <a:t>Feature Route</a:t>
-            </a:r>
-          </a:p>
-        </p:txBody>
-      </p:sp>
-      <p:sp>
-        <p:nvSpPr>
-          <p:cNvPr id="10" name="Stage Modeling"/>
-          <p:cNvSpPr/>
-          <p:nvPr/>
-        </p:nvSpPr>
-        <p:spPr>
-          <a:xfrm>
-            <a:off x="4303779" y="3654279"/>
-            <a:ext cx="4215221" cy="730905"/>
+              <a:t>Key Technologies</a:t>
+            </a:r>
+          </a:p>
+        </p:txBody>
+      </p:sp>
+      <p:sp>
+        <p:nvSpPr>
+          <p:cNvPr id="10" name="Stage Experimental Validation"/>
+          <p:cNvSpPr/>
+          <p:nvPr/>
+        </p:nvSpPr>
+        <p:spPr>
+          <a:xfrm>
+            <a:off x="3253376" y="4312145"/>
+            <a:ext cx="6761581" cy="869346"/>
           </a:xfrm>
           <a:prstGeom prst="roundRect">
             <a:avLst/>
@@ -475,14 +497,14 @@
       </p:sp>
       <p:sp>
         <p:nvSpPr>
-          <p:cNvPr id="11" name="Header Modeling"/>
-          <p:cNvSpPr/>
-          <p:nvPr/>
-        </p:nvSpPr>
-        <p:spPr>
-          <a:xfrm>
-            <a:off x="4303779" y="3654279"/>
-            <a:ext cx="4215221" cy="260000"/>
+          <p:cNvPr id="11" name="Label Experimental Validation"/>
+          <p:cNvSpPr/>
+          <p:nvPr/>
+        </p:nvSpPr>
+        <p:spPr>
+          <a:xfrm>
+            <a:off x="2108047" y="4553630"/>
+            <a:ext cx="883145" cy="386376"/>
           </a:xfrm>
           <a:prstGeom prst="roundRect">
             <a:avLst/>
@@ -502,26 +524,37 @@
           <a:p>
             <a:pPr algn="ctr"/>
             <a:r>
-              <a:rPr lang="en-US" sz="1100" b="1">
+              <a:rPr lang="en-US" sz="1050" b="1">
                 <a:solidFill>
                   <a:srgbClr val="122033"/>
                 </a:solidFill>
               </a:rPr>
-              <a:t>Modeling</a:t>
-            </a:r>
-          </a:p>
-        </p:txBody>
-      </p:sp>
-      <p:sp>
-        <p:nvSpPr>
-          <p:cNvPr id="12" name="Stage Validation"/>
-          <p:cNvSpPr/>
-          <p:nvPr/>
-        </p:nvSpPr>
-        <p:spPr>
-          <a:xfrm>
-            <a:off x="4303779" y="4575420"/>
-            <a:ext cx="4215221" cy="730905"/>
+              <a:t>Experimental</a:t>
+            </a:r>
+          </a:p>
+          <a:p>
+            <a:pPr algn="ctr"/>
+            <a:r>
+              <a:rPr lang="en-US" sz="1050" b="1">
+                <a:solidFill>
+                  <a:srgbClr val="122033"/>
+                </a:solidFill>
+              </a:rPr>
+              <a:t>Validation</a:t>
+            </a:r>
+          </a:p>
+        </p:txBody>
+      </p:sp>
+      <p:sp>
+        <p:nvSpPr>
+          <p:cNvPr id="12" name="Stage Expected Outputs"/>
+          <p:cNvSpPr/>
+          <p:nvPr/>
+        </p:nvSpPr>
+        <p:spPr>
+          <a:xfrm>
+            <a:off x="3253376" y="5347081"/>
+            <a:ext cx="6761581" cy="869346"/>
           </a:xfrm>
           <a:prstGeom prst="roundRect">
             <a:avLst/>
@@ -554,14 +587,14 @@
       </p:sp>
       <p:sp>
         <p:nvSpPr>
-          <p:cNvPr id="13" name="Header Validation"/>
-          <p:cNvSpPr/>
-          <p:nvPr/>
-        </p:nvSpPr>
-        <p:spPr>
-          <a:xfrm>
-            <a:off x="4303779" y="4575420"/>
-            <a:ext cx="4215221" cy="260000"/>
+          <p:cNvPr id="13" name="Label Expected Outputs"/>
+          <p:cNvSpPr/>
+          <p:nvPr/>
+        </p:nvSpPr>
+        <p:spPr>
+          <a:xfrm>
+            <a:off x="2108047" y="5588566"/>
+            <a:ext cx="883145" cy="386376"/>
           </a:xfrm>
           <a:prstGeom prst="roundRect">
             <a:avLst/>
@@ -581,95 +614,60 @@
           <a:p>
             <a:pPr algn="ctr"/>
             <a:r>
-              <a:rPr lang="en-US" sz="1100" b="1">
+              <a:rPr lang="en-US" sz="1050" b="1">
                 <a:solidFill>
                   <a:srgbClr val="122033"/>
                 </a:solidFill>
               </a:rPr>
-              <a:t>Validation</a:t>
-            </a:r>
-          </a:p>
-        </p:txBody>
-      </p:sp>
-      <p:sp>
-        <p:nvSpPr>
-          <p:cNvPr id="14" name="Stage Thesis Output"/>
-          <p:cNvSpPr/>
-          <p:nvPr/>
-        </p:nvSpPr>
-        <p:spPr>
-          <a:xfrm>
-            <a:off x="4303779" y="5496561"/>
-            <a:ext cx="4215221" cy="730905"/>
-          </a:xfrm>
-          <a:prstGeom prst="roundRect">
-            <a:avLst/>
-          </a:prstGeom>
-          <a:solidFill>
-            <a:srgbClr val="F6E7D7"/>
-          </a:solidFill>
-          <a:ln w="12700">
-            <a:solidFill>
-              <a:srgbClr val="6FAEC3"/>
-            </a:solidFill>
-            <a:prstDash val="dash"/>
-          </a:ln>
-        </p:spPr>
-        <p:txBody>
-          <a:bodyPr wrap="square" anchor="ctr"/>
-          <a:lstStyle/>
-          <a:p>
-            <a:pPr algn="ctr"/>
-            <a:r>
-              <a:rPr lang="en-US" sz="1000">
-                <a:solidFill>
-                  <a:srgbClr val="162033"/>
-                </a:solidFill>
-              </a:rPr>
-              <a:t/>
-            </a:r>
-          </a:p>
-        </p:txBody>
-      </p:sp>
-      <p:sp>
-        <p:nvSpPr>
-          <p:cNvPr id="15" name="Header Thesis Output"/>
-          <p:cNvSpPr/>
-          <p:nvPr/>
-        </p:nvSpPr>
-        <p:spPr>
-          <a:xfrm>
-            <a:off x="4303779" y="5496561"/>
-            <a:ext cx="4215221" cy="260000"/>
-          </a:xfrm>
-          <a:prstGeom prst="roundRect">
-            <a:avLst/>
-          </a:prstGeom>
-          <a:solidFill>
-            <a:srgbClr val="7BCFD0"/>
-          </a:solidFill>
-          <a:ln w="12700">
-            <a:solidFill>
-              <a:srgbClr val="7BCFD0"/>
-            </a:solidFill>
-          </a:ln>
-        </p:spPr>
-        <p:txBody>
-          <a:bodyPr wrap="square" anchor="ctr"/>
-          <a:lstStyle/>
-          <a:p>
-            <a:pPr algn="ctr"/>
-            <a:r>
-              <a:rPr lang="en-US" sz="1100" b="1">
-                <a:solidFill>
-                  <a:srgbClr val="122033"/>
-                </a:solidFill>
-              </a:rPr>
-              <a:t>Thesis Output</a:t>
-            </a:r>
-          </a:p>
-        </p:txBody>
-      </p:sp>
+              <a:t>Expected Outputs</a:t>
+            </a:r>
+          </a:p>
+        </p:txBody>
+      </p:sp>
+      <p:cxnSp>
+        <p:nvCxnSpPr>
+          <p:cNvPr id="14" name="Connector 14"/>
+          <p:cNvCxnSpPr/>
+          <p:nvPr/>
+        </p:nvCxnSpPr>
+        <p:spPr>
+          <a:xfrm>
+            <a:off x="5040365" y="1635111"/>
+            <a:ext cx="3187602" cy="1"/>
+          </a:xfrm>
+          <a:prstGeom prst="line">
+            <a:avLst/>
+          </a:prstGeom>
+          <a:ln w="19050">
+            <a:solidFill>
+              <a:srgbClr val="2C6A93"/>
+            </a:solidFill>
+            <a:headEnd type="triangle"/>
+          </a:ln>
+        </p:spPr>
+      </p:cxnSp>
+      <p:cxnSp>
+        <p:nvCxnSpPr>
+          <p:cNvPr id="15" name="Connector 15"/>
+          <p:cNvCxnSpPr/>
+          <p:nvPr/>
+        </p:nvCxnSpPr>
+        <p:spPr>
+          <a:xfrm flipH="1">
+            <a:off x="4509098" y="1635111"/>
+            <a:ext cx="3718869" cy="1034935"/>
+          </a:xfrm>
+          <a:prstGeom prst="line">
+            <a:avLst/>
+          </a:prstGeom>
+          <a:ln w="19050">
+            <a:solidFill>
+              <a:srgbClr val="2C6A93"/>
+            </a:solidFill>
+            <a:headEnd type="triangle"/>
+          </a:ln>
+        </p:spPr>
+      </p:cxnSp>
       <p:cxnSp>
         <p:nvCxnSpPr>
           <p:cNvPr id="16" name="Connector 16"/>
@@ -677,9 +675,9 @@
           <p:nvPr/>
         </p:nvCxnSpPr>
         <p:spPr>
-          <a:xfrm flipH="1">
-            <a:off x="5425168" y="1346420"/>
-            <a:ext cx="986221" cy="921141"/>
+          <a:xfrm>
+            <a:off x="4509098" y="2670047"/>
+            <a:ext cx="2125068" cy="1"/>
           </a:xfrm>
           <a:prstGeom prst="line">
             <a:avLst/>
@@ -700,8 +698,8 @@
         </p:nvCxnSpPr>
         <p:spPr>
           <a:xfrm>
-            <a:off x="5425168" y="2267561"/>
-            <a:ext cx="1972443" cy="1"/>
+            <a:off x="6634166" y="2670047"/>
+            <a:ext cx="2125068" cy="1"/>
           </a:xfrm>
           <a:prstGeom prst="line">
             <a:avLst/>
@@ -722,8 +720,8 @@
         </p:nvCxnSpPr>
         <p:spPr>
           <a:xfrm flipH="1">
-            <a:off x="5425168" y="2267561"/>
-            <a:ext cx="1972443" cy="921141"/>
+            <a:off x="4509098" y="2670047"/>
+            <a:ext cx="4250136" cy="1034935"/>
           </a:xfrm>
           <a:prstGeom prst="line">
             <a:avLst/>
@@ -744,8 +742,8 @@
         </p:nvCxnSpPr>
         <p:spPr>
           <a:xfrm>
-            <a:off x="5425168" y="3188702"/>
-            <a:ext cx="1972443" cy="1"/>
+            <a:off x="4509098" y="3704982"/>
+            <a:ext cx="2125068" cy="1"/>
           </a:xfrm>
           <a:prstGeom prst="line">
             <a:avLst/>
@@ -765,9 +763,9 @@
           <p:nvPr/>
         </p:nvCxnSpPr>
         <p:spPr>
-          <a:xfrm flipH="1">
-            <a:off x="5425168" y="3188702"/>
-            <a:ext cx="1972443" cy="921141"/>
+          <a:xfrm>
+            <a:off x="6634166" y="3704982"/>
+            <a:ext cx="2125068" cy="1"/>
           </a:xfrm>
           <a:prstGeom prst="line">
             <a:avLst/>
@@ -787,9 +785,9 @@
           <p:nvPr/>
         </p:nvCxnSpPr>
         <p:spPr>
-          <a:xfrm>
-            <a:off x="5425168" y="4109843"/>
-            <a:ext cx="1972443" cy="1"/>
+          <a:xfrm flipH="1">
+            <a:off x="5040365" y="3704982"/>
+            <a:ext cx="3718869" cy="1034935"/>
           </a:xfrm>
           <a:prstGeom prst="line">
             <a:avLst/>
@@ -809,9 +807,9 @@
           <p:nvPr/>
         </p:nvCxnSpPr>
         <p:spPr>
-          <a:xfrm flipH="1">
-            <a:off x="5425168" y="4109843"/>
-            <a:ext cx="1972443" cy="921141"/>
+          <a:xfrm>
+            <a:off x="5040365" y="4739918"/>
+            <a:ext cx="3187602" cy="1"/>
           </a:xfrm>
           <a:prstGeom prst="line">
             <a:avLst/>
@@ -831,9 +829,9 @@
           <p:nvPr/>
         </p:nvCxnSpPr>
         <p:spPr>
-          <a:xfrm>
-            <a:off x="5425168" y="5030984"/>
-            <a:ext cx="1972443" cy="1"/>
+          <a:xfrm flipH="1">
+            <a:off x="5040365" y="4739918"/>
+            <a:ext cx="3187602" cy="1034935"/>
           </a:xfrm>
           <a:prstGeom prst="line">
             <a:avLst/>
@@ -853,9 +851,9 @@
           <p:nvPr/>
         </p:nvCxnSpPr>
         <p:spPr>
-          <a:xfrm flipH="1">
-            <a:off x="6411390" y="5030984"/>
-            <a:ext cx="986221" cy="921141"/>
+          <a:xfrm>
+            <a:off x="5040365" y="5774854"/>
+            <a:ext cx="3187602" cy="1"/>
           </a:xfrm>
           <a:prstGeom prst="line">
             <a:avLst/>
@@ -870,14 +868,14 @@
       </p:cxnSp>
       <p:sp>
         <p:nvSpPr>
-          <p:cNvPr id="25" name="Node question_define"/>
-          <p:cNvSpPr/>
-          <p:nvPr/>
-        </p:nvSpPr>
-        <p:spPr>
-          <a:xfrm>
-            <a:off x="4478996" y="1191227"/>
-            <a:ext cx="3864787" cy="310384"/>
+          <p:cNvPr id="25" name="Node objective_problem"/>
+          <p:cNvSpPr/>
+          <p:nvPr/>
+        </p:nvSpPr>
+        <p:spPr>
+          <a:xfrm>
+            <a:off x="3501760" y="1428123"/>
+            <a:ext cx="3077209" cy="413974"/>
           </a:xfrm>
           <a:prstGeom prst="roundRect">
             <a:avLst/>
@@ -920,14 +918,14 @@
       </p:sp>
       <p:sp>
         <p:nvSpPr>
-          <p:cNvPr id="26" name="Node evidence_collect"/>
-          <p:cNvSpPr/>
-          <p:nvPr/>
-        </p:nvSpPr>
-        <p:spPr>
-          <a:xfrm>
-            <a:off x="4478996" y="2112368"/>
-            <a:ext cx="1892344" cy="310384"/>
+          <p:cNvPr id="26" name="Node objective_scope"/>
+          <p:cNvSpPr/>
+          <p:nvPr/>
+        </p:nvSpPr>
+        <p:spPr>
+          <a:xfrm>
+            <a:off x="6689363" y="1428123"/>
+            <a:ext cx="3077209" cy="413974"/>
           </a:xfrm>
           <a:prstGeom prst="roundRect">
             <a:avLst/>
@@ -952,6 +950,56 @@
                   <a:srgbClr val="162033"/>
                 </a:solidFill>
               </a:rPr>
+              <a:t>Set evaluation</a:t>
+            </a:r>
+          </a:p>
+          <a:p>
+            <a:pPr algn="ctr"/>
+            <a:r>
+              <a:rPr lang="en-US" sz="1050">
+                <a:solidFill>
+                  <a:srgbClr val="162033"/>
+                </a:solidFill>
+              </a:rPr>
+              <a:t>scope</a:t>
+            </a:r>
+          </a:p>
+        </p:txBody>
+      </p:sp>
+      <p:sp>
+        <p:nvSpPr>
+          <p:cNvPr id="27" name="Node content_collect"/>
+          <p:cNvSpPr/>
+          <p:nvPr/>
+        </p:nvSpPr>
+        <p:spPr>
+          <a:xfrm>
+            <a:off x="3501760" y="2463059"/>
+            <a:ext cx="2014675" cy="413974"/>
+          </a:xfrm>
+          <a:prstGeom prst="roundRect">
+            <a:avLst/>
+          </a:prstGeom>
+          <a:solidFill>
+            <a:srgbClr val="FFFFFF"/>
+          </a:solidFill>
+          <a:ln w="12700">
+            <a:solidFill>
+              <a:srgbClr val="9FB6C4"/>
+            </a:solidFill>
+          </a:ln>
+        </p:spPr>
+        <p:txBody>
+          <a:bodyPr wrap="square" anchor="ctr"/>
+          <a:lstStyle/>
+          <a:p>
+            <a:pPr algn="ctr"/>
+            <a:r>
+              <a:rPr lang="en-US" sz="1050">
+                <a:solidFill>
+                  <a:srgbClr val="162033"/>
+                </a:solidFill>
+              </a:rPr>
               <a:t>Collect field</a:t>
             </a:r>
           </a:p>
@@ -970,14 +1018,14 @@
       </p:sp>
       <p:sp>
         <p:nvSpPr>
-          <p:cNvPr id="27" name="Node evidence_align"/>
-          <p:cNvSpPr/>
-          <p:nvPr/>
-        </p:nvSpPr>
-        <p:spPr>
-          <a:xfrm>
-            <a:off x="6451440" y="2112368"/>
-            <a:ext cx="1892344" cy="310384"/>
+          <p:cNvPr id="28" name="Node content_clean"/>
+          <p:cNvSpPr/>
+          <p:nvPr/>
+        </p:nvSpPr>
+        <p:spPr>
+          <a:xfrm>
+            <a:off x="5626829" y="2463059"/>
+            <a:ext cx="2014675" cy="413974"/>
           </a:xfrm>
           <a:prstGeom prst="roundRect">
             <a:avLst/>
@@ -1013,21 +1061,21 @@
                   <a:srgbClr val="162033"/>
                 </a:solidFill>
               </a:rPr>
-              <a:t>data</a:t>
-            </a:r>
-          </a:p>
-        </p:txBody>
-      </p:sp>
-      <p:sp>
-        <p:nvSpPr>
-          <p:cNvPr id="28" name="Node features_construct"/>
-          <p:cNvSpPr/>
-          <p:nvPr/>
-        </p:nvSpPr>
-        <p:spPr>
-          <a:xfrm>
-            <a:off x="4478996" y="3033510"/>
-            <a:ext cx="1892344" cy="310384"/>
+              <a:t>records</a:t>
+            </a:r>
+          </a:p>
+        </p:txBody>
+      </p:sp>
+      <p:sp>
+        <p:nvSpPr>
+          <p:cNvPr id="29" name="Node content_indicators"/>
+          <p:cNvSpPr/>
+          <p:nvPr/>
+        </p:nvSpPr>
+        <p:spPr>
+          <a:xfrm>
+            <a:off x="7751897" y="2463059"/>
+            <a:ext cx="2014675" cy="413974"/>
           </a:xfrm>
           <a:prstGeom prst="roundRect">
             <a:avLst/>
@@ -1070,14 +1118,14 @@
       </p:sp>
       <p:sp>
         <p:nvSpPr>
-          <p:cNvPr id="29" name="Node features_select"/>
-          <p:cNvSpPr/>
-          <p:nvPr/>
-        </p:nvSpPr>
-        <p:spPr>
-          <a:xfrm>
-            <a:off x="6451440" y="3033510"/>
-            <a:ext cx="1892344" cy="310384"/>
+          <p:cNvPr id="30" name="Node technology_select"/>
+          <p:cNvSpPr/>
+          <p:nvPr/>
+        </p:nvSpPr>
+        <p:spPr>
+          <a:xfrm>
+            <a:off x="3501760" y="3497995"/>
+            <a:ext cx="2014675" cy="413974"/>
           </a:xfrm>
           <a:prstGeom prst="roundRect">
             <a:avLst/>
@@ -1120,14 +1168,14 @@
       </p:sp>
       <p:sp>
         <p:nvSpPr>
-          <p:cNvPr id="30" name="Node model_fit"/>
-          <p:cNvSpPr/>
-          <p:nvPr/>
-        </p:nvSpPr>
-        <p:spPr>
-          <a:xfrm>
-            <a:off x="4478996" y="3954651"/>
-            <a:ext cx="1892344" cy="310384"/>
+          <p:cNvPr id="31" name="Node technology_model"/>
+          <p:cNvSpPr/>
+          <p:nvPr/>
+        </p:nvSpPr>
+        <p:spPr>
+          <a:xfrm>
+            <a:off x="5626829" y="3497995"/>
+            <a:ext cx="2014675" cy="413974"/>
           </a:xfrm>
           <a:prstGeom prst="roundRect">
             <a:avLst/>
@@ -1152,32 +1200,21 @@
                   <a:srgbClr val="162033"/>
                 </a:solidFill>
               </a:rPr>
-              <a:t>Fit interpretable</a:t>
-            </a:r>
-          </a:p>
-          <a:p>
-            <a:pPr algn="ctr"/>
-            <a:r>
-              <a:rPr lang="en-US" sz="1050">
-                <a:solidFill>
-                  <a:srgbClr val="162033"/>
-                </a:solidFill>
-              </a:rPr>
-              <a:t>model</a:t>
-            </a:r>
-          </a:p>
-        </p:txBody>
-      </p:sp>
-      <p:sp>
-        <p:nvSpPr>
-          <p:cNvPr id="31" name="Node model_uncertainty"/>
-          <p:cNvSpPr/>
-          <p:nvPr/>
-        </p:nvSpPr>
-        <p:spPr>
-          <a:xfrm>
-            <a:off x="6451440" y="3954651"/>
-            <a:ext cx="1892344" cy="310384"/>
+              <a:t>Fit risk model</a:t>
+            </a:r>
+          </a:p>
+        </p:txBody>
+      </p:sp>
+      <p:sp>
+        <p:nvSpPr>
+          <p:cNvPr id="32" name="Node technology_uncertainty"/>
+          <p:cNvSpPr/>
+          <p:nvPr/>
+        </p:nvSpPr>
+        <p:spPr>
+          <a:xfrm>
+            <a:off x="7751897" y="3497995"/>
+            <a:ext cx="2014675" cy="413974"/>
           </a:xfrm>
           <a:prstGeom prst="roundRect">
             <a:avLst/>
@@ -1202,21 +1239,32 @@
                   <a:srgbClr val="162033"/>
                 </a:solidFill>
               </a:rPr>
-              <a:t>Label uncertainty</a:t>
-            </a:r>
-          </a:p>
-        </p:txBody>
-      </p:sp>
-      <p:sp>
-        <p:nvSpPr>
-          <p:cNvPr id="32" name="Node validation_cases"/>
-          <p:cNvSpPr/>
-          <p:nvPr/>
-        </p:nvSpPr>
-        <p:spPr>
-          <a:xfrm>
-            <a:off x="4478996" y="4875792"/>
-            <a:ext cx="1892344" cy="310384"/>
+              <a:t>Estimate</a:t>
+            </a:r>
+          </a:p>
+          <a:p>
+            <a:pPr algn="ctr"/>
+            <a:r>
+              <a:rPr lang="en-US" sz="1050">
+                <a:solidFill>
+                  <a:srgbClr val="162033"/>
+                </a:solidFill>
+              </a:rPr>
+              <a:t>uncertainty</a:t>
+            </a:r>
+          </a:p>
+        </p:txBody>
+      </p:sp>
+      <p:sp>
+        <p:nvSpPr>
+          <p:cNvPr id="33" name="Node validation_cases"/>
+          <p:cNvSpPr/>
+          <p:nvPr/>
+        </p:nvSpPr>
+        <p:spPr>
+          <a:xfrm>
+            <a:off x="3501760" y="4532931"/>
+            <a:ext cx="3077209" cy="413974"/>
           </a:xfrm>
           <a:prstGeom prst="roundRect">
             <a:avLst/>
@@ -1241,7 +1289,7 @@
                   <a:srgbClr val="162033"/>
                 </a:solidFill>
               </a:rPr>
-              <a:t>Validate on fault</a:t>
+              <a:t>Validate fault</a:t>
             </a:r>
           </a:p>
           <a:p>
@@ -1259,14 +1307,14 @@
       </p:sp>
       <p:sp>
         <p:nvSpPr>
-          <p:cNvPr id="33" name="Node validation_review"/>
-          <p:cNvSpPr/>
-          <p:nvPr/>
-        </p:nvSpPr>
-        <p:spPr>
-          <a:xfrm>
-            <a:off x="6451440" y="4875792"/>
-            <a:ext cx="1892344" cy="310384"/>
+          <p:cNvPr id="34" name="Node validation_ablation"/>
+          <p:cNvSpPr/>
+          <p:nvPr/>
+        </p:nvSpPr>
+        <p:spPr>
+          <a:xfrm>
+            <a:off x="6689363" y="4532931"/>
+            <a:ext cx="3077209" cy="413974"/>
           </a:xfrm>
           <a:prstGeom prst="roundRect">
             <a:avLst/>
@@ -1309,14 +1357,14 @@
       </p:sp>
       <p:sp>
         <p:nvSpPr>
-          <p:cNvPr id="34" name="Node output_priority"/>
-          <p:cNvSpPr/>
-          <p:nvPr/>
-        </p:nvSpPr>
-        <p:spPr>
-          <a:xfrm>
-            <a:off x="4478996" y="5796933"/>
-            <a:ext cx="3864787" cy="310384"/>
+          <p:cNvPr id="35" name="Node output_priority"/>
+          <p:cNvSpPr/>
+          <p:nvPr/>
+        </p:nvSpPr>
+        <p:spPr>
+          <a:xfrm>
+            <a:off x="3501760" y="5567867"/>
+            <a:ext cx="3077209" cy="413974"/>
           </a:xfrm>
           <a:prstGeom prst="roundRect">
             <a:avLst/>
@@ -1353,6 +1401,56 @@
                 </a:solidFill>
               </a:rPr>
               <a:t>priority</a:t>
+            </a:r>
+          </a:p>
+        </p:txBody>
+      </p:sp>
+      <p:sp>
+        <p:nvSpPr>
+          <p:cNvPr id="36" name="Node output_thesis"/>
+          <p:cNvSpPr/>
+          <p:nvPr/>
+        </p:nvSpPr>
+        <p:spPr>
+          <a:xfrm>
+            <a:off x="6689363" y="5567867"/>
+            <a:ext cx="3077209" cy="413974"/>
+          </a:xfrm>
+          <a:prstGeom prst="roundRect">
+            <a:avLst/>
+          </a:prstGeom>
+          <a:solidFill>
+            <a:srgbClr val="FFFFFF"/>
+          </a:solidFill>
+          <a:ln w="12700">
+            <a:solidFill>
+              <a:srgbClr val="9FB6C4"/>
+            </a:solidFill>
+          </a:ln>
+        </p:spPr>
+        <p:txBody>
+          <a:bodyPr wrap="square" anchor="ctr"/>
+          <a:lstStyle/>
+          <a:p>
+            <a:pPr algn="ctr"/>
+            <a:r>
+              <a:rPr lang="en-US" sz="1050">
+                <a:solidFill>
+                  <a:srgbClr val="162033"/>
+                </a:solidFill>
+              </a:rPr>
+              <a:t>Support thesis</a:t>
+            </a:r>
+          </a:p>
+          <a:p>
+            <a:pPr algn="ctr"/>
+            <a:r>
+              <a:rPr lang="en-US" sz="1050">
+                <a:solidFill>
+                  <a:srgbClr val="162033"/>
+                </a:solidFill>
+              </a:rPr>
+              <a:t>chapters</a:t>
             </a:r>
           </a:p>
         </p:txBody>

--- a/examples/thesis-proposal-demo/outputs/tech-route.pptx
+++ b/examples/thesis-proposal-demo/outputs/tech-route.pptx
@@ -100,11 +100,11 @@
             <a:avLst/>
           </a:prstGeom>
           <a:solidFill>
-            <a:srgbClr val="D9F2F2"/>
-          </a:solidFill>
-          <a:ln w="12700">
-            <a:solidFill>
-              <a:srgbClr val="D9F2F2"/>
+            <a:srgbClr val="DBEAFE"/>
+          </a:solidFill>
+          <a:ln w="12700">
+            <a:solidFill>
+              <a:srgbClr val="DBEAFE"/>
             </a:solidFill>
           </a:ln>
         </p:spPr>
@@ -116,10 +116,10 @@
             <a:r>
               <a:rPr lang="en-US" sz="2100" b="1">
                 <a:solidFill>
-                  <a:srgbClr val="162033"/>
-                </a:solidFill>
-              </a:rPr>
-              <a:t>PV Module</a:t>
+                  <a:srgbClr val="172033"/>
+                </a:solidFill>
+              </a:rPr>
+              <a:t>Photovoltaic</a:t>
             </a:r>
           </a:p>
           <a:p>
@@ -127,10 +127,10 @@
             <a:r>
               <a:rPr lang="en-US" sz="2100" b="1">
                 <a:solidFill>
-                  <a:srgbClr val="162033"/>
-                </a:solidFill>
-              </a:rPr>
-              <a:t>Degradation</a:t>
+                  <a:srgbClr val="172033"/>
+                </a:solidFill>
+              </a:rPr>
+              <a:t>Self-Cleaning</a:t>
             </a:r>
           </a:p>
           <a:p>
@@ -138,10 +138,10 @@
             <a:r>
               <a:rPr lang="en-US" sz="2100" b="1">
                 <a:solidFill>
-                  <a:srgbClr val="162033"/>
-                </a:solidFill>
-              </a:rPr>
-              <a:t>Assessment</a:t>
+                  <a:srgbClr val="172033"/>
+                </a:solidFill>
+              </a:rPr>
+              <a:t>Coating Proposal</a:t>
             </a:r>
           </a:p>
           <a:p>
@@ -149,10 +149,10 @@
             <a:r>
               <a:rPr lang="en-US" sz="2100" b="1">
                 <a:solidFill>
-                  <a:srgbClr val="162033"/>
-                </a:solidFill>
-              </a:rPr>
-              <a:t>Technical Route</a:t>
+                  <a:srgbClr val="172033"/>
+                </a:solidFill>
+              </a:rPr>
+              <a:t>Route</a:t>
             </a:r>
           </a:p>
         </p:txBody>
@@ -188,7 +188,7 @@
             <a:r>
               <a:rPr lang="en-US" sz="850">
                 <a:solidFill>
-                  <a:srgbClr val="5B6472"/>
+                  <a:srgbClr val="4B5563"/>
                 </a:solidFill>
               </a:rPr>
               <a:t>Thesis proposal</a:t>
@@ -199,10 +199,10 @@
             <a:r>
               <a:rPr lang="en-US" sz="850">
                 <a:solidFill>
-                  <a:srgbClr val="5B6472"/>
-                </a:solidFill>
-              </a:rPr>
-              <a:t>route generated by</a:t>
+                  <a:srgbClr val="4B5563"/>
+                </a:solidFill>
+              </a:rPr>
+              <a:t>technical route</a:t>
             </a:r>
           </a:p>
           <a:p>
@@ -210,7 +210,18 @@
             <a:r>
               <a:rPr lang="en-US" sz="850">
                 <a:solidFill>
-                  <a:srgbClr val="5B6472"/>
+                  <a:srgbClr val="4B5563"/>
+                </a:solidFill>
+              </a:rPr>
+              <a:t>generated by</a:t>
+            </a:r>
+          </a:p>
+          <a:p>
+            <a:pPr algn="ctr"/>
+            <a:r>
+              <a:rPr lang="en-US" sz="850">
+                <a:solidFill>
+                  <a:srgbClr val="4B5563"/>
                 </a:solidFill>
               </a:rPr>
               <a:t>tech-route-maker</a:t>
@@ -233,13 +244,12 @@
             <a:avLst/>
           </a:prstGeom>
           <a:solidFill>
-            <a:srgbClr val="D9F2F2"/>
-          </a:solidFill>
-          <a:ln w="12700">
-            <a:solidFill>
-              <a:srgbClr val="6FAEC3"/>
-            </a:solidFill>
-            <a:prstDash val="dash"/>
+            <a:srgbClr val="DBEAFE"/>
+          </a:solidFill>
+          <a:ln w="12700">
+            <a:solidFill>
+              <a:srgbClr val="CBD5E1"/>
+            </a:solidFill>
           </a:ln>
         </p:spPr>
         <p:txBody>
@@ -250,7 +260,7 @@
             <a:r>
               <a:rPr lang="en-US" sz="1000">
                 <a:solidFill>
-                  <a:srgbClr val="162033"/>
+                  <a:srgbClr val="172033"/>
                 </a:solidFill>
               </a:rPr>
               <a:t/>
@@ -273,11 +283,11 @@
             <a:avLst/>
           </a:prstGeom>
           <a:solidFill>
-            <a:srgbClr val="7BCFD0"/>
-          </a:solidFill>
-          <a:ln w="12700">
-            <a:solidFill>
-              <a:srgbClr val="7BCFD0"/>
+            <a:srgbClr val="4338CA"/>
+          </a:solidFill>
+          <a:ln w="12700">
+            <a:solidFill>
+              <a:srgbClr val="4338CA"/>
             </a:solidFill>
           </a:ln>
         </p:spPr>
@@ -289,7 +299,7 @@
             <a:r>
               <a:rPr lang="en-US" sz="1050" b="1">
                 <a:solidFill>
-                  <a:srgbClr val="122033"/>
+                  <a:srgbClr val="FFFFFF"/>
                 </a:solidFill>
               </a:rPr>
               <a:t>Research Objective</a:t>
@@ -312,13 +322,12 @@
             <a:avLst/>
           </a:prstGeom>
           <a:solidFill>
-            <a:srgbClr val="F7E0E8"/>
-          </a:solidFill>
-          <a:ln w="12700">
-            <a:solidFill>
-              <a:srgbClr val="6FAEC3"/>
-            </a:solidFill>
-            <a:prstDash val="dash"/>
+            <a:srgbClr val="EDE9FE"/>
+          </a:solidFill>
+          <a:ln w="12700">
+            <a:solidFill>
+              <a:srgbClr val="CBD5E1"/>
+            </a:solidFill>
           </a:ln>
         </p:spPr>
         <p:txBody>
@@ -329,7 +338,7 @@
             <a:r>
               <a:rPr lang="en-US" sz="1000">
                 <a:solidFill>
-                  <a:srgbClr val="162033"/>
+                  <a:srgbClr val="172033"/>
                 </a:solidFill>
               </a:rPr>
               <a:t/>
@@ -352,11 +361,11 @@
             <a:avLst/>
           </a:prstGeom>
           <a:solidFill>
-            <a:srgbClr val="7BCFD0"/>
-          </a:solidFill>
-          <a:ln w="12700">
-            <a:solidFill>
-              <a:srgbClr val="7BCFD0"/>
+            <a:srgbClr val="4338CA"/>
+          </a:solidFill>
+          <a:ln w="12700">
+            <a:solidFill>
+              <a:srgbClr val="4338CA"/>
             </a:solidFill>
           </a:ln>
         </p:spPr>
@@ -368,7 +377,7 @@
             <a:r>
               <a:rPr lang="en-US" sz="1050" b="1">
                 <a:solidFill>
-                  <a:srgbClr val="122033"/>
+                  <a:srgbClr val="FFFFFF"/>
                 </a:solidFill>
               </a:rPr>
               <a:t>Research Content</a:t>
@@ -378,7 +387,7 @@
       </p:sp>
       <p:sp>
         <p:nvSpPr>
-          <p:cNvPr id="8" name="Stage Key Technologies"/>
+          <p:cNvPr id="8" name="Stage Key Technology"/>
           <p:cNvSpPr/>
           <p:nvPr/>
         </p:nvSpPr>
@@ -391,13 +400,12 @@
             <a:avLst/>
           </a:prstGeom>
           <a:solidFill>
-            <a:srgbClr val="FFF1C7"/>
-          </a:solidFill>
-          <a:ln w="12700">
-            <a:solidFill>
-              <a:srgbClr val="6FAEC3"/>
-            </a:solidFill>
-            <a:prstDash val="dash"/>
+            <a:srgbClr val="DCFCE7"/>
+          </a:solidFill>
+          <a:ln w="12700">
+            <a:solidFill>
+              <a:srgbClr val="CBD5E1"/>
+            </a:solidFill>
           </a:ln>
         </p:spPr>
         <p:txBody>
@@ -408,7 +416,7 @@
             <a:r>
               <a:rPr lang="en-US" sz="1000">
                 <a:solidFill>
-                  <a:srgbClr val="162033"/>
+                  <a:srgbClr val="172033"/>
                 </a:solidFill>
               </a:rPr>
               <a:t/>
@@ -418,7 +426,7 @@
       </p:sp>
       <p:sp>
         <p:nvSpPr>
-          <p:cNvPr id="9" name="Label Key Technologies"/>
+          <p:cNvPr id="9" name="Label Key Technology"/>
           <p:cNvSpPr/>
           <p:nvPr/>
         </p:nvSpPr>
@@ -431,11 +439,11 @@
             <a:avLst/>
           </a:prstGeom>
           <a:solidFill>
-            <a:srgbClr val="7BCFD0"/>
-          </a:solidFill>
-          <a:ln w="12700">
-            <a:solidFill>
-              <a:srgbClr val="7BCFD0"/>
+            <a:srgbClr val="4338CA"/>
+          </a:solidFill>
+          <a:ln w="12700">
+            <a:solidFill>
+              <a:srgbClr val="4338CA"/>
             </a:solidFill>
           </a:ln>
         </p:spPr>
@@ -447,10 +455,10 @@
             <a:r>
               <a:rPr lang="en-US" sz="1050" b="1">
                 <a:solidFill>
-                  <a:srgbClr val="122033"/>
-                </a:solidFill>
-              </a:rPr>
-              <a:t>Key Technologies</a:t>
+                  <a:srgbClr val="FFFFFF"/>
+                </a:solidFill>
+              </a:rPr>
+              <a:t>Key Technology</a:t>
             </a:r>
           </a:p>
         </p:txBody>
@@ -470,13 +478,12 @@
             <a:avLst/>
           </a:prstGeom>
           <a:solidFill>
-            <a:srgbClr val="DDECF9"/>
-          </a:solidFill>
-          <a:ln w="12700">
-            <a:solidFill>
-              <a:srgbClr val="6FAEC3"/>
-            </a:solidFill>
-            <a:prstDash val="dash"/>
+            <a:srgbClr val="FEF3C7"/>
+          </a:solidFill>
+          <a:ln w="12700">
+            <a:solidFill>
+              <a:srgbClr val="CBD5E1"/>
+            </a:solidFill>
           </a:ln>
         </p:spPr>
         <p:txBody>
@@ -487,7 +494,7 @@
             <a:r>
               <a:rPr lang="en-US" sz="1000">
                 <a:solidFill>
-                  <a:srgbClr val="162033"/>
+                  <a:srgbClr val="172033"/>
                 </a:solidFill>
               </a:rPr>
               <a:t/>
@@ -510,11 +517,11 @@
             <a:avLst/>
           </a:prstGeom>
           <a:solidFill>
-            <a:srgbClr val="7BCFD0"/>
-          </a:solidFill>
-          <a:ln w="12700">
-            <a:solidFill>
-              <a:srgbClr val="7BCFD0"/>
+            <a:srgbClr val="4338CA"/>
+          </a:solidFill>
+          <a:ln w="12700">
+            <a:solidFill>
+              <a:srgbClr val="4338CA"/>
             </a:solidFill>
           </a:ln>
         </p:spPr>
@@ -526,7 +533,7 @@
             <a:r>
               <a:rPr lang="en-US" sz="1050" b="1">
                 <a:solidFill>
-                  <a:srgbClr val="122033"/>
+                  <a:srgbClr val="FFFFFF"/>
                 </a:solidFill>
               </a:rPr>
               <a:t>Experimental</a:t>
@@ -537,7 +544,7 @@
             <a:r>
               <a:rPr lang="en-US" sz="1050" b="1">
                 <a:solidFill>
-                  <a:srgbClr val="122033"/>
+                  <a:srgbClr val="FFFFFF"/>
                 </a:solidFill>
               </a:rPr>
               <a:t>Validation</a:t>
@@ -547,7 +554,7 @@
       </p:sp>
       <p:sp>
         <p:nvSpPr>
-          <p:cNvPr id="12" name="Stage Expected Outputs"/>
+          <p:cNvPr id="12" name="Stage Expected Outcomes"/>
           <p:cNvSpPr/>
           <p:nvPr/>
         </p:nvSpPr>
@@ -560,13 +567,12 @@
             <a:avLst/>
           </a:prstGeom>
           <a:solidFill>
-            <a:srgbClr val="E6F4D7"/>
-          </a:solidFill>
-          <a:ln w="12700">
-            <a:solidFill>
-              <a:srgbClr val="6FAEC3"/>
-            </a:solidFill>
-            <a:prstDash val="dash"/>
+            <a:srgbClr val="FFE4E6"/>
+          </a:solidFill>
+          <a:ln w="12700">
+            <a:solidFill>
+              <a:srgbClr val="CBD5E1"/>
+            </a:solidFill>
           </a:ln>
         </p:spPr>
         <p:txBody>
@@ -577,7 +583,7 @@
             <a:r>
               <a:rPr lang="en-US" sz="1000">
                 <a:solidFill>
-                  <a:srgbClr val="162033"/>
+                  <a:srgbClr val="172033"/>
                 </a:solidFill>
               </a:rPr>
               <a:t/>
@@ -587,7 +593,7 @@
       </p:sp>
       <p:sp>
         <p:nvSpPr>
-          <p:cNvPr id="13" name="Label Expected Outputs"/>
+          <p:cNvPr id="13" name="Label Expected Outcomes"/>
           <p:cNvSpPr/>
           <p:nvPr/>
         </p:nvSpPr>
@@ -600,11 +606,11 @@
             <a:avLst/>
           </a:prstGeom>
           <a:solidFill>
-            <a:srgbClr val="7BCFD0"/>
-          </a:solidFill>
-          <a:ln w="12700">
-            <a:solidFill>
-              <a:srgbClr val="7BCFD0"/>
+            <a:srgbClr val="4338CA"/>
+          </a:solidFill>
+          <a:ln w="12700">
+            <a:solidFill>
+              <a:srgbClr val="4338CA"/>
             </a:solidFill>
           </a:ln>
         </p:spPr>
@@ -616,10 +622,10 @@
             <a:r>
               <a:rPr lang="en-US" sz="1050" b="1">
                 <a:solidFill>
-                  <a:srgbClr val="122033"/>
-                </a:solidFill>
-              </a:rPr>
-              <a:t>Expected Outputs</a:t>
+                  <a:srgbClr val="FFFFFF"/>
+                </a:solidFill>
+              </a:rPr>
+              <a:t>Expected Outcomes</a:t>
             </a:r>
           </a:p>
         </p:txBody>
@@ -640,7 +646,7 @@
           </a:prstGeom>
           <a:ln w="19050">
             <a:solidFill>
-              <a:srgbClr val="2C6A93"/>
+              <a:srgbClr val="7C3AED"/>
             </a:solidFill>
             <a:headEnd type="triangle"/>
           </a:ln>
@@ -662,7 +668,7 @@
           </a:prstGeom>
           <a:ln w="19050">
             <a:solidFill>
-              <a:srgbClr val="2C6A93"/>
+              <a:srgbClr val="7C3AED"/>
             </a:solidFill>
             <a:headEnd type="triangle"/>
           </a:ln>
@@ -684,7 +690,7 @@
           </a:prstGeom>
           <a:ln w="19050">
             <a:solidFill>
-              <a:srgbClr val="2C6A93"/>
+              <a:srgbClr val="7C3AED"/>
             </a:solidFill>
             <a:headEnd type="triangle"/>
           </a:ln>
@@ -706,7 +712,7 @@
           </a:prstGeom>
           <a:ln w="19050">
             <a:solidFill>
-              <a:srgbClr val="2C6A93"/>
+              <a:srgbClr val="7C3AED"/>
             </a:solidFill>
             <a:headEnd type="triangle"/>
           </a:ln>
@@ -728,7 +734,7 @@
           </a:prstGeom>
           <a:ln w="19050">
             <a:solidFill>
-              <a:srgbClr val="2C6A93"/>
+              <a:srgbClr val="7C3AED"/>
             </a:solidFill>
             <a:headEnd type="triangle"/>
           </a:ln>
@@ -750,7 +756,7 @@
           </a:prstGeom>
           <a:ln w="19050">
             <a:solidFill>
-              <a:srgbClr val="2C6A93"/>
+              <a:srgbClr val="7C3AED"/>
             </a:solidFill>
             <a:headEnd type="triangle"/>
           </a:ln>
@@ -772,7 +778,7 @@
           </a:prstGeom>
           <a:ln w="19050">
             <a:solidFill>
-              <a:srgbClr val="2C6A93"/>
+              <a:srgbClr val="7C3AED"/>
             </a:solidFill>
             <a:headEnd type="triangle"/>
           </a:ln>
@@ -786,15 +792,15 @@
         </p:nvCxnSpPr>
         <p:spPr>
           <a:xfrm flipH="1">
-            <a:off x="5040365" y="3704982"/>
-            <a:ext cx="3718869" cy="1034935"/>
+            <a:off x="4509098" y="3704982"/>
+            <a:ext cx="4250136" cy="1034935"/>
           </a:xfrm>
           <a:prstGeom prst="line">
             <a:avLst/>
           </a:prstGeom>
           <a:ln w="19050">
             <a:solidFill>
-              <a:srgbClr val="2C6A93"/>
+              <a:srgbClr val="7C3AED"/>
             </a:solidFill>
             <a:headEnd type="triangle"/>
           </a:ln>
@@ -808,15 +814,15 @@
         </p:nvCxnSpPr>
         <p:spPr>
           <a:xfrm>
-            <a:off x="5040365" y="4739918"/>
-            <a:ext cx="3187602" cy="1"/>
+            <a:off x="4509098" y="4739918"/>
+            <a:ext cx="2125068" cy="1"/>
           </a:xfrm>
           <a:prstGeom prst="line">
             <a:avLst/>
           </a:prstGeom>
           <a:ln w="19050">
             <a:solidFill>
-              <a:srgbClr val="2C6A93"/>
+              <a:srgbClr val="7C3AED"/>
             </a:solidFill>
             <a:headEnd type="triangle"/>
           </a:ln>
@@ -829,16 +835,16 @@
           <p:nvPr/>
         </p:nvCxnSpPr>
         <p:spPr>
-          <a:xfrm flipH="1">
-            <a:off x="5040365" y="4739918"/>
-            <a:ext cx="3187602" cy="1034935"/>
+          <a:xfrm>
+            <a:off x="6634166" y="4739918"/>
+            <a:ext cx="2125068" cy="1"/>
           </a:xfrm>
           <a:prstGeom prst="line">
             <a:avLst/>
           </a:prstGeom>
           <a:ln w="19050">
             <a:solidFill>
-              <a:srgbClr val="2C6A93"/>
+              <a:srgbClr val="7C3AED"/>
             </a:solidFill>
             <a:headEnd type="triangle"/>
           </a:ln>
@@ -851,6 +857,28 @@
           <p:nvPr/>
         </p:nvCxnSpPr>
         <p:spPr>
+          <a:xfrm flipH="1">
+            <a:off x="5040365" y="4739918"/>
+            <a:ext cx="3718869" cy="1034935"/>
+          </a:xfrm>
+          <a:prstGeom prst="line">
+            <a:avLst/>
+          </a:prstGeom>
+          <a:ln w="19050">
+            <a:solidFill>
+              <a:srgbClr val="7C3AED"/>
+            </a:solidFill>
+            <a:headEnd type="triangle"/>
+          </a:ln>
+        </p:spPr>
+      </p:cxnSp>
+      <p:cxnSp>
+        <p:nvCxnSpPr>
+          <p:cNvPr id="25" name="Connector 25"/>
+          <p:cNvCxnSpPr/>
+          <p:nvPr/>
+        </p:nvCxnSpPr>
+        <p:spPr>
           <a:xfrm>
             <a:off x="5040365" y="5774854"/>
             <a:ext cx="3187602" cy="1"/>
@@ -860,7 +888,7 @@
           </a:prstGeom>
           <a:ln w="19050">
             <a:solidFill>
-              <a:srgbClr val="2C6A93"/>
+              <a:srgbClr val="7C3AED"/>
             </a:solidFill>
             <a:headEnd type="triangle"/>
           </a:ln>
@@ -868,7 +896,7 @@
       </p:cxnSp>
       <p:sp>
         <p:nvSpPr>
-          <p:cNvPr id="25" name="Node objective_problem"/>
+          <p:cNvPr id="26" name="Node objective_problem"/>
           <p:cNvSpPr/>
           <p:nvPr/>
         </p:nvSpPr>
@@ -885,40 +913,40 @@
           </a:solidFill>
           <a:ln w="12700">
             <a:solidFill>
-              <a:srgbClr val="9FB6C4"/>
-            </a:solidFill>
-          </a:ln>
-        </p:spPr>
-        <p:txBody>
-          <a:bodyPr wrap="square" anchor="ctr"/>
-          <a:lstStyle/>
-          <a:p>
-            <a:pPr algn="ctr"/>
-            <a:r>
-              <a:rPr lang="en-US" sz="1050">
-                <a:solidFill>
-                  <a:srgbClr val="162033"/>
-                </a:solidFill>
-              </a:rPr>
-              <a:t>Define degradation</a:t>
-            </a:r>
-          </a:p>
-          <a:p>
-            <a:pPr algn="ctr"/>
-            <a:r>
-              <a:rPr lang="en-US" sz="1050">
-                <a:solidFill>
-                  <a:srgbClr val="162033"/>
-                </a:solidFill>
-              </a:rPr>
-              <a:t>risk</a:t>
-            </a:r>
-          </a:p>
-        </p:txBody>
-      </p:sp>
-      <p:sp>
-        <p:nvSpPr>
-          <p:cNvPr id="26" name="Node objective_scope"/>
+              <a:srgbClr val="8B5CF6"/>
+            </a:solidFill>
+          </a:ln>
+        </p:spPr>
+        <p:txBody>
+          <a:bodyPr wrap="square" anchor="ctr"/>
+          <a:lstStyle/>
+          <a:p>
+            <a:pPr algn="ctr"/>
+            <a:r>
+              <a:rPr lang="en-US" sz="1050">
+                <a:solidFill>
+                  <a:srgbClr val="172033"/>
+                </a:solidFill>
+              </a:rPr>
+              <a:t>Reduce surface</a:t>
+            </a:r>
+          </a:p>
+          <a:p>
+            <a:pPr algn="ctr"/>
+            <a:r>
+              <a:rPr lang="en-US" sz="1050">
+                <a:solidFill>
+                  <a:srgbClr val="172033"/>
+                </a:solidFill>
+              </a:rPr>
+              <a:t>contamination</a:t>
+            </a:r>
+          </a:p>
+        </p:txBody>
+      </p:sp>
+      <p:sp>
+        <p:nvSpPr>
+          <p:cNvPr id="27" name="Node objective_value"/>
           <p:cNvSpPr/>
           <p:nvPr/>
         </p:nvSpPr>
@@ -935,40 +963,40 @@
           </a:solidFill>
           <a:ln w="12700">
             <a:solidFill>
-              <a:srgbClr val="9FB6C4"/>
-            </a:solidFill>
-          </a:ln>
-        </p:spPr>
-        <p:txBody>
-          <a:bodyPr wrap="square" anchor="ctr"/>
-          <a:lstStyle/>
-          <a:p>
-            <a:pPr algn="ctr"/>
-            <a:r>
-              <a:rPr lang="en-US" sz="1050">
-                <a:solidFill>
-                  <a:srgbClr val="162033"/>
-                </a:solidFill>
-              </a:rPr>
-              <a:t>Set evaluation</a:t>
-            </a:r>
-          </a:p>
-          <a:p>
-            <a:pPr algn="ctr"/>
-            <a:r>
-              <a:rPr lang="en-US" sz="1050">
-                <a:solidFill>
-                  <a:srgbClr val="162033"/>
-                </a:solidFill>
-              </a:rPr>
-              <a:t>scope</a:t>
-            </a:r>
-          </a:p>
-        </p:txBody>
-      </p:sp>
-      <p:sp>
-        <p:nvSpPr>
-          <p:cNvPr id="27" name="Node content_collect"/>
+              <a:srgbClr val="8B5CF6"/>
+            </a:solidFill>
+          </a:ln>
+        </p:spPr>
+        <p:txBody>
+          <a:bodyPr wrap="square" anchor="ctr"/>
+          <a:lstStyle/>
+          <a:p>
+            <a:pPr algn="ctr"/>
+            <a:r>
+              <a:rPr lang="en-US" sz="1050">
+                <a:solidFill>
+                  <a:srgbClr val="172033"/>
+                </a:solidFill>
+              </a:rPr>
+              <a:t>Protect optical</a:t>
+            </a:r>
+          </a:p>
+          <a:p>
+            <a:pPr algn="ctr"/>
+            <a:r>
+              <a:rPr lang="en-US" sz="1050">
+                <a:solidFill>
+                  <a:srgbClr val="172033"/>
+                </a:solidFill>
+              </a:rPr>
+              <a:t>efficiency</a:t>
+            </a:r>
+          </a:p>
+        </p:txBody>
+      </p:sp>
+      <p:sp>
+        <p:nvSpPr>
+          <p:cNvPr id="28" name="Node content_material"/>
           <p:cNvSpPr/>
           <p:nvPr/>
         </p:nvSpPr>
@@ -985,40 +1013,40 @@
           </a:solidFill>
           <a:ln w="12700">
             <a:solidFill>
-              <a:srgbClr val="9FB6C4"/>
-            </a:solidFill>
-          </a:ln>
-        </p:spPr>
-        <p:txBody>
-          <a:bodyPr wrap="square" anchor="ctr"/>
-          <a:lstStyle/>
-          <a:p>
-            <a:pPr algn="ctr"/>
-            <a:r>
-              <a:rPr lang="en-US" sz="1050">
-                <a:solidFill>
-                  <a:srgbClr val="162033"/>
-                </a:solidFill>
-              </a:rPr>
-              <a:t>Collect field</a:t>
-            </a:r>
-          </a:p>
-          <a:p>
-            <a:pPr algn="ctr"/>
-            <a:r>
-              <a:rPr lang="en-US" sz="1050">
-                <a:solidFill>
-                  <a:srgbClr val="162033"/>
-                </a:solidFill>
-              </a:rPr>
-              <a:t>evidence</a:t>
-            </a:r>
-          </a:p>
-        </p:txBody>
-      </p:sp>
-      <p:sp>
-        <p:nvSpPr>
-          <p:cNvPr id="28" name="Node content_clean"/>
+              <a:srgbClr val="8B5CF6"/>
+            </a:solidFill>
+          </a:ln>
+        </p:spPr>
+        <p:txBody>
+          <a:bodyPr wrap="square" anchor="ctr"/>
+          <a:lstStyle/>
+          <a:p>
+            <a:pPr algn="ctr"/>
+            <a:r>
+              <a:rPr lang="en-US" sz="1050">
+                <a:solidFill>
+                  <a:srgbClr val="172033"/>
+                </a:solidFill>
+              </a:rPr>
+              <a:t>Select coating</a:t>
+            </a:r>
+          </a:p>
+          <a:p>
+            <a:pPr algn="ctr"/>
+            <a:r>
+              <a:rPr lang="en-US" sz="1050">
+                <a:solidFill>
+                  <a:srgbClr val="172033"/>
+                </a:solidFill>
+              </a:rPr>
+              <a:t>chemistry</a:t>
+            </a:r>
+          </a:p>
+        </p:txBody>
+      </p:sp>
+      <p:sp>
+        <p:nvSpPr>
+          <p:cNvPr id="29" name="Node content_texture"/>
           <p:cNvSpPr/>
           <p:nvPr/>
         </p:nvSpPr>
@@ -1035,40 +1063,40 @@
           </a:solidFill>
           <a:ln w="12700">
             <a:solidFill>
-              <a:srgbClr val="9FB6C4"/>
-            </a:solidFill>
-          </a:ln>
-        </p:spPr>
-        <p:txBody>
-          <a:bodyPr wrap="square" anchor="ctr"/>
-          <a:lstStyle/>
-          <a:p>
-            <a:pPr algn="ctr"/>
-            <a:r>
-              <a:rPr lang="en-US" sz="1050">
-                <a:solidFill>
-                  <a:srgbClr val="162033"/>
-                </a:solidFill>
-              </a:rPr>
-              <a:t>Clean and align</a:t>
-            </a:r>
-          </a:p>
-          <a:p>
-            <a:pPr algn="ctr"/>
-            <a:r>
-              <a:rPr lang="en-US" sz="1050">
-                <a:solidFill>
-                  <a:srgbClr val="162033"/>
-                </a:solidFill>
-              </a:rPr>
-              <a:t>records</a:t>
-            </a:r>
-          </a:p>
-        </p:txBody>
-      </p:sp>
-      <p:sp>
-        <p:nvSpPr>
-          <p:cNvPr id="29" name="Node content_indicators"/>
+              <a:srgbClr val="8B5CF6"/>
+            </a:solidFill>
+          </a:ln>
+        </p:spPr>
+        <p:txBody>
+          <a:bodyPr wrap="square" anchor="ctr"/>
+          <a:lstStyle/>
+          <a:p>
+            <a:pPr algn="ctr"/>
+            <a:r>
+              <a:rPr lang="en-US" sz="1050">
+                <a:solidFill>
+                  <a:srgbClr val="172033"/>
+                </a:solidFill>
+              </a:rPr>
+              <a:t>Design micro nano</a:t>
+            </a:r>
+          </a:p>
+          <a:p>
+            <a:pPr algn="ctr"/>
+            <a:r>
+              <a:rPr lang="en-US" sz="1050">
+                <a:solidFill>
+                  <a:srgbClr val="172033"/>
+                </a:solidFill>
+              </a:rPr>
+              <a:t>texture</a:t>
+            </a:r>
+          </a:p>
+        </p:txBody>
+      </p:sp>
+      <p:sp>
+        <p:nvSpPr>
+          <p:cNvPr id="30" name="Node content_process"/>
           <p:cNvSpPr/>
           <p:nvPr/>
         </p:nvSpPr>
@@ -1085,40 +1113,40 @@
           </a:solidFill>
           <a:ln w="12700">
             <a:solidFill>
-              <a:srgbClr val="9FB6C4"/>
-            </a:solidFill>
-          </a:ln>
-        </p:spPr>
-        <p:txBody>
-          <a:bodyPr wrap="square" anchor="ctr"/>
-          <a:lstStyle/>
-          <a:p>
-            <a:pPr algn="ctr"/>
-            <a:r>
-              <a:rPr lang="en-US" sz="1050">
-                <a:solidFill>
-                  <a:srgbClr val="162033"/>
-                </a:solidFill>
-              </a:rPr>
-              <a:t>Construct</a:t>
-            </a:r>
-          </a:p>
-          <a:p>
-            <a:pPr algn="ctr"/>
-            <a:r>
-              <a:rPr lang="en-US" sz="1050">
-                <a:solidFill>
-                  <a:srgbClr val="162033"/>
-                </a:solidFill>
-              </a:rPr>
-              <a:t>indicators</a:t>
-            </a:r>
-          </a:p>
-        </p:txBody>
-      </p:sp>
-      <p:sp>
-        <p:nvSpPr>
-          <p:cNvPr id="30" name="Node technology_select"/>
+              <a:srgbClr val="8B5CF6"/>
+            </a:solidFill>
+          </a:ln>
+        </p:spPr>
+        <p:txBody>
+          <a:bodyPr wrap="square" anchor="ctr"/>
+          <a:lstStyle/>
+          <a:p>
+            <a:pPr algn="ctr"/>
+            <a:r>
+              <a:rPr lang="en-US" sz="1050">
+                <a:solidFill>
+                  <a:srgbClr val="172033"/>
+                </a:solidFill>
+              </a:rPr>
+              <a:t>Plan scalable</a:t>
+            </a:r>
+          </a:p>
+          <a:p>
+            <a:pPr algn="ctr"/>
+            <a:r>
+              <a:rPr lang="en-US" sz="1050">
+                <a:solidFill>
+                  <a:srgbClr val="172033"/>
+                </a:solidFill>
+              </a:rPr>
+              <a:t>process</a:t>
+            </a:r>
+          </a:p>
+        </p:txBody>
+      </p:sp>
+      <p:sp>
+        <p:nvSpPr>
+          <p:cNvPr id="31" name="Node technology_wettability"/>
           <p:cNvSpPr/>
           <p:nvPr/>
         </p:nvSpPr>
@@ -1135,40 +1163,40 @@
           </a:solidFill>
           <a:ln w="12700">
             <a:solidFill>
-              <a:srgbClr val="9FB6C4"/>
-            </a:solidFill>
-          </a:ln>
-        </p:spPr>
-        <p:txBody>
-          <a:bodyPr wrap="square" anchor="ctr"/>
-          <a:lstStyle/>
-          <a:p>
-            <a:pPr algn="ctr"/>
-            <a:r>
-              <a:rPr lang="en-US" sz="1050">
-                <a:solidFill>
-                  <a:srgbClr val="162033"/>
-                </a:solidFill>
-              </a:rPr>
-              <a:t>Select feature</a:t>
-            </a:r>
-          </a:p>
-          <a:p>
-            <a:pPr algn="ctr"/>
-            <a:r>
-              <a:rPr lang="en-US" sz="1050">
-                <a:solidFill>
-                  <a:srgbClr val="162033"/>
-                </a:solidFill>
-              </a:rPr>
-              <a:t>groups</a:t>
-            </a:r>
-          </a:p>
-        </p:txBody>
-      </p:sp>
-      <p:sp>
-        <p:nvSpPr>
-          <p:cNvPr id="31" name="Node technology_model"/>
+              <a:srgbClr val="8B5CF6"/>
+            </a:solidFill>
+          </a:ln>
+        </p:spPr>
+        <p:txBody>
+          <a:bodyPr wrap="square" anchor="ctr"/>
+          <a:lstStyle/>
+          <a:p>
+            <a:pPr algn="ctr"/>
+            <a:r>
+              <a:rPr lang="en-US" sz="1050">
+                <a:solidFill>
+                  <a:srgbClr val="172033"/>
+                </a:solidFill>
+              </a:rPr>
+              <a:t>Tune wetting</a:t>
+            </a:r>
+          </a:p>
+          <a:p>
+            <a:pPr algn="ctr"/>
+            <a:r>
+              <a:rPr lang="en-US" sz="1050">
+                <a:solidFill>
+                  <a:srgbClr val="172033"/>
+                </a:solidFill>
+              </a:rPr>
+              <a:t>behavior</a:t>
+            </a:r>
+          </a:p>
+        </p:txBody>
+      </p:sp>
+      <p:sp>
+        <p:nvSpPr>
+          <p:cNvPr id="32" name="Node technology_durability"/>
           <p:cNvSpPr/>
           <p:nvPr/>
         </p:nvSpPr>
@@ -1185,29 +1213,29 @@
           </a:solidFill>
           <a:ln w="12700">
             <a:solidFill>
-              <a:srgbClr val="9FB6C4"/>
-            </a:solidFill>
-          </a:ln>
-        </p:spPr>
-        <p:txBody>
-          <a:bodyPr wrap="square" anchor="ctr"/>
-          <a:lstStyle/>
-          <a:p>
-            <a:pPr algn="ctr"/>
-            <a:r>
-              <a:rPr lang="en-US" sz="1050">
-                <a:solidFill>
-                  <a:srgbClr val="162033"/>
-                </a:solidFill>
-              </a:rPr>
-              <a:t>Fit risk model</a:t>
-            </a:r>
-          </a:p>
-        </p:txBody>
-      </p:sp>
-      <p:sp>
-        <p:nvSpPr>
-          <p:cNvPr id="32" name="Node technology_uncertainty"/>
+              <a:srgbClr val="8B5CF6"/>
+            </a:solidFill>
+          </a:ln>
+        </p:spPr>
+        <p:txBody>
+          <a:bodyPr wrap="square" anchor="ctr"/>
+          <a:lstStyle/>
+          <a:p>
+            <a:pPr algn="ctr"/>
+            <a:r>
+              <a:rPr lang="en-US" sz="1050">
+                <a:solidFill>
+                  <a:srgbClr val="172033"/>
+                </a:solidFill>
+              </a:rPr>
+              <a:t>Improve durability</a:t>
+            </a:r>
+          </a:p>
+        </p:txBody>
+      </p:sp>
+      <p:sp>
+        <p:nvSpPr>
+          <p:cNvPr id="33" name="Node technology_transparency"/>
           <p:cNvSpPr/>
           <p:nvPr/>
         </p:nvSpPr>
@@ -1224,47 +1252,47 @@
           </a:solidFill>
           <a:ln w="12700">
             <a:solidFill>
-              <a:srgbClr val="9FB6C4"/>
-            </a:solidFill>
-          </a:ln>
-        </p:spPr>
-        <p:txBody>
-          <a:bodyPr wrap="square" anchor="ctr"/>
-          <a:lstStyle/>
-          <a:p>
-            <a:pPr algn="ctr"/>
-            <a:r>
-              <a:rPr lang="en-US" sz="1050">
-                <a:solidFill>
-                  <a:srgbClr val="162033"/>
-                </a:solidFill>
-              </a:rPr>
-              <a:t>Estimate</a:t>
-            </a:r>
-          </a:p>
-          <a:p>
-            <a:pPr algn="ctr"/>
-            <a:r>
-              <a:rPr lang="en-US" sz="1050">
-                <a:solidFill>
-                  <a:srgbClr val="162033"/>
-                </a:solidFill>
-              </a:rPr>
-              <a:t>uncertainty</a:t>
-            </a:r>
-          </a:p>
-        </p:txBody>
-      </p:sp>
-      <p:sp>
-        <p:nvSpPr>
-          <p:cNvPr id="33" name="Node validation_cases"/>
+              <a:srgbClr val="8B5CF6"/>
+            </a:solidFill>
+          </a:ln>
+        </p:spPr>
+        <p:txBody>
+          <a:bodyPr wrap="square" anchor="ctr"/>
+          <a:lstStyle/>
+          <a:p>
+            <a:pPr algn="ctr"/>
+            <a:r>
+              <a:rPr lang="en-US" sz="1050">
+                <a:solidFill>
+                  <a:srgbClr val="172033"/>
+                </a:solidFill>
+              </a:rPr>
+              <a:t>Maintain</a:t>
+            </a:r>
+          </a:p>
+          <a:p>
+            <a:pPr algn="ctr"/>
+            <a:r>
+              <a:rPr lang="en-US" sz="1050">
+                <a:solidFill>
+                  <a:srgbClr val="172033"/>
+                </a:solidFill>
+              </a:rPr>
+              <a:t>transparency</a:t>
+            </a:r>
+          </a:p>
+        </p:txBody>
+      </p:sp>
+      <p:sp>
+        <p:nvSpPr>
+          <p:cNvPr id="34" name="Node validation_surface"/>
           <p:cNvSpPr/>
           <p:nvPr/>
         </p:nvSpPr>
         <p:spPr>
           <a:xfrm>
             <a:off x="3501760" y="4532931"/>
-            <a:ext cx="3077209" cy="413974"/>
+            <a:ext cx="2014675" cy="413974"/>
           </a:xfrm>
           <a:prstGeom prst="roundRect">
             <a:avLst/>
@@ -1274,47 +1302,47 @@
           </a:solidFill>
           <a:ln w="12700">
             <a:solidFill>
-              <a:srgbClr val="9FB6C4"/>
-            </a:solidFill>
-          </a:ln>
-        </p:spPr>
-        <p:txBody>
-          <a:bodyPr wrap="square" anchor="ctr"/>
-          <a:lstStyle/>
-          <a:p>
-            <a:pPr algn="ctr"/>
-            <a:r>
-              <a:rPr lang="en-US" sz="1050">
-                <a:solidFill>
-                  <a:srgbClr val="162033"/>
-                </a:solidFill>
-              </a:rPr>
-              <a:t>Validate fault</a:t>
-            </a:r>
-          </a:p>
-          <a:p>
-            <a:pPr algn="ctr"/>
-            <a:r>
-              <a:rPr lang="en-US" sz="1050">
-                <a:solidFill>
-                  <a:srgbClr val="162033"/>
-                </a:solidFill>
-              </a:rPr>
-              <a:t>cases</a:t>
-            </a:r>
-          </a:p>
-        </p:txBody>
-      </p:sp>
-      <p:sp>
-        <p:nvSpPr>
-          <p:cNvPr id="34" name="Node validation_ablation"/>
-          <p:cNvSpPr/>
-          <p:nvPr/>
-        </p:nvSpPr>
-        <p:spPr>
-          <a:xfrm>
-            <a:off x="6689363" y="4532931"/>
-            <a:ext cx="3077209" cy="413974"/>
+              <a:srgbClr val="8B5CF6"/>
+            </a:solidFill>
+          </a:ln>
+        </p:spPr>
+        <p:txBody>
+          <a:bodyPr wrap="square" anchor="ctr"/>
+          <a:lstStyle/>
+          <a:p>
+            <a:pPr algn="ctr"/>
+            <a:r>
+              <a:rPr lang="en-US" sz="1050">
+                <a:solidFill>
+                  <a:srgbClr val="172033"/>
+                </a:solidFill>
+              </a:rPr>
+              <a:t>Characterize</a:t>
+            </a:r>
+          </a:p>
+          <a:p>
+            <a:pPr algn="ctr"/>
+            <a:r>
+              <a:rPr lang="en-US" sz="1050">
+                <a:solidFill>
+                  <a:srgbClr val="172033"/>
+                </a:solidFill>
+              </a:rPr>
+              <a:t>surface structure</a:t>
+            </a:r>
+          </a:p>
+        </p:txBody>
+      </p:sp>
+      <p:sp>
+        <p:nvSpPr>
+          <p:cNvPr id="35" name="Node validation_cleaning"/>
+          <p:cNvSpPr/>
+          <p:nvPr/>
+        </p:nvSpPr>
+        <p:spPr>
+          <a:xfrm>
+            <a:off x="5626829" y="4532931"/>
+            <a:ext cx="2014675" cy="413974"/>
           </a:xfrm>
           <a:prstGeom prst="roundRect">
             <a:avLst/>
@@ -1324,40 +1352,79 @@
           </a:solidFill>
           <a:ln w="12700">
             <a:solidFill>
-              <a:srgbClr val="9FB6C4"/>
-            </a:solidFill>
-          </a:ln>
-        </p:spPr>
-        <p:txBody>
-          <a:bodyPr wrap="square" anchor="ctr"/>
-          <a:lstStyle/>
-          <a:p>
-            <a:pPr algn="ctr"/>
-            <a:r>
-              <a:rPr lang="en-US" sz="1050">
-                <a:solidFill>
-                  <a:srgbClr val="162033"/>
-                </a:solidFill>
-              </a:rPr>
-              <a:t>Review feature</a:t>
-            </a:r>
-          </a:p>
-          <a:p>
-            <a:pPr algn="ctr"/>
-            <a:r>
-              <a:rPr lang="en-US" sz="1050">
-                <a:solidFill>
-                  <a:srgbClr val="162033"/>
-                </a:solidFill>
-              </a:rPr>
-              <a:t>ablation</a:t>
-            </a:r>
-          </a:p>
-        </p:txBody>
-      </p:sp>
-      <p:sp>
-        <p:nvSpPr>
-          <p:cNvPr id="35" name="Node output_priority"/>
+              <a:srgbClr val="8B5CF6"/>
+            </a:solidFill>
+          </a:ln>
+        </p:spPr>
+        <p:txBody>
+          <a:bodyPr wrap="square" anchor="ctr"/>
+          <a:lstStyle/>
+          <a:p>
+            <a:pPr algn="ctr"/>
+            <a:r>
+              <a:rPr lang="en-US" sz="1050">
+                <a:solidFill>
+                  <a:srgbClr val="172033"/>
+                </a:solidFill>
+              </a:rPr>
+              <a:t>Test self-cleaning</a:t>
+            </a:r>
+          </a:p>
+          <a:p>
+            <a:pPr algn="ctr"/>
+            <a:r>
+              <a:rPr lang="en-US" sz="1050">
+                <a:solidFill>
+                  <a:srgbClr val="172033"/>
+                </a:solidFill>
+              </a:rPr>
+              <a:t>function</a:t>
+            </a:r>
+          </a:p>
+        </p:txBody>
+      </p:sp>
+      <p:sp>
+        <p:nvSpPr>
+          <p:cNvPr id="36" name="Node validation_power"/>
+          <p:cNvSpPr/>
+          <p:nvPr/>
+        </p:nvSpPr>
+        <p:spPr>
+          <a:xfrm>
+            <a:off x="7751897" y="4532931"/>
+            <a:ext cx="2014675" cy="413974"/>
+          </a:xfrm>
+          <a:prstGeom prst="roundRect">
+            <a:avLst/>
+          </a:prstGeom>
+          <a:solidFill>
+            <a:srgbClr val="FFFFFF"/>
+          </a:solidFill>
+          <a:ln w="12700">
+            <a:solidFill>
+              <a:srgbClr val="8B5CF6"/>
+            </a:solidFill>
+          </a:ln>
+        </p:spPr>
+        <p:txBody>
+          <a:bodyPr wrap="square" anchor="ctr"/>
+          <a:lstStyle/>
+          <a:p>
+            <a:pPr algn="ctr"/>
+            <a:r>
+              <a:rPr lang="en-US" sz="1050">
+                <a:solidFill>
+                  <a:srgbClr val="172033"/>
+                </a:solidFill>
+              </a:rPr>
+              <a:t>Measure PV impact</a:t>
+            </a:r>
+          </a:p>
+        </p:txBody>
+      </p:sp>
+      <p:sp>
+        <p:nvSpPr>
+          <p:cNvPr id="37" name="Node outcome_route"/>
           <p:cNvSpPr/>
           <p:nvPr/>
         </p:nvSpPr>
@@ -1374,40 +1441,40 @@
           </a:solidFill>
           <a:ln w="12700">
             <a:solidFill>
-              <a:srgbClr val="9FB6C4"/>
-            </a:solidFill>
-          </a:ln>
-        </p:spPr>
-        <p:txBody>
-          <a:bodyPr wrap="square" anchor="ctr"/>
-          <a:lstStyle/>
-          <a:p>
-            <a:pPr algn="ctr"/>
-            <a:r>
-              <a:rPr lang="en-US" sz="1050">
-                <a:solidFill>
-                  <a:srgbClr val="162033"/>
-                </a:solidFill>
-              </a:rPr>
-              <a:t>Output inspection</a:t>
-            </a:r>
-          </a:p>
-          <a:p>
-            <a:pPr algn="ctr"/>
-            <a:r>
-              <a:rPr lang="en-US" sz="1050">
-                <a:solidFill>
-                  <a:srgbClr val="162033"/>
-                </a:solidFill>
-              </a:rPr>
-              <a:t>priority</a:t>
-            </a:r>
-          </a:p>
-        </p:txBody>
-      </p:sp>
-      <p:sp>
-        <p:nvSpPr>
-          <p:cNvPr id="36" name="Node output_thesis"/>
+              <a:srgbClr val="8B5CF6"/>
+            </a:solidFill>
+          </a:ln>
+        </p:spPr>
+        <p:txBody>
+          <a:bodyPr wrap="square" anchor="ctr"/>
+          <a:lstStyle/>
+          <a:p>
+            <a:pPr algn="ctr"/>
+            <a:r>
+              <a:rPr lang="en-US" sz="1050">
+                <a:solidFill>
+                  <a:srgbClr val="172033"/>
+                </a:solidFill>
+              </a:rPr>
+              <a:t>Form technical</a:t>
+            </a:r>
+          </a:p>
+          <a:p>
+            <a:pPr algn="ctr"/>
+            <a:r>
+              <a:rPr lang="en-US" sz="1050">
+                <a:solidFill>
+                  <a:srgbClr val="172033"/>
+                </a:solidFill>
+              </a:rPr>
+              <a:t>route</a:t>
+            </a:r>
+          </a:p>
+        </p:txBody>
+      </p:sp>
+      <p:sp>
+        <p:nvSpPr>
+          <p:cNvPr id="38" name="Node outcome_thesis"/>
           <p:cNvSpPr/>
           <p:nvPr/>
         </p:nvSpPr>
@@ -1424,19 +1491,19 @@
           </a:solidFill>
           <a:ln w="12700">
             <a:solidFill>
-              <a:srgbClr val="9FB6C4"/>
-            </a:solidFill>
-          </a:ln>
-        </p:spPr>
-        <p:txBody>
-          <a:bodyPr wrap="square" anchor="ctr"/>
-          <a:lstStyle/>
-          <a:p>
-            <a:pPr algn="ctr"/>
-            <a:r>
-              <a:rPr lang="en-US" sz="1050">
-                <a:solidFill>
-                  <a:srgbClr val="162033"/>
+              <a:srgbClr val="8B5CF6"/>
+            </a:solidFill>
+          </a:ln>
+        </p:spPr>
+        <p:txBody>
+          <a:bodyPr wrap="square" anchor="ctr"/>
+          <a:lstStyle/>
+          <a:p>
+            <a:pPr algn="ctr"/>
+            <a:r>
+              <a:rPr lang="en-US" sz="1050">
+                <a:solidFill>
+                  <a:srgbClr val="172033"/>
                 </a:solidFill>
               </a:rPr>
               <a:t>Support thesis</a:t>
@@ -1447,7 +1514,7 @@
             <a:r>
               <a:rPr lang="en-US" sz="1050">
                 <a:solidFill>
-                  <a:srgbClr val="162033"/>
+                  <a:srgbClr val="172033"/>
                 </a:solidFill>
               </a:rPr>
               <a:t>chapters</a:t>
